--- a/tests/testdata/office/PowerPoint/グラフとSmartArt.pptx
+++ b/tests/testdata/office/PowerPoint/グラフとSmartArt.pptx
@@ -222,133 +222,7 @@
           </c:val>
           <c:extLst>
             <c:ext xmlns:c16="http://schemas.microsoft.com/office/drawing/2014/chart" uri="{C3380CC4-5D6E-409C-BE32-E72D297353CC}">
-              <c16:uniqueId val="{00000000-CAD9-4586-ABF2-95F4B89BB020}"/>
-            </c:ext>
-          </c:extLst>
-        </c:ser>
-        <c:ser>
-          <c:idx val="1"/>
-          <c:order val="1"/>
-          <c:tx>
-            <c:v>TC32 系列名</c:v>
-          </c:tx>
-          <c:spPr>
-            <a:solidFill>
-              <a:schemeClr val="accent2"/>
-            </a:solidFill>
-            <a:ln>
-              <a:noFill/>
-            </a:ln>
-            <a:effectLst/>
-          </c:spPr>
-          <c:invertIfNegative val="0"/>
-          <c:cat>
-            <c:strRef>
-              <c:f>Sheet1!$A$2:$A$5</c:f>
-              <c:strCache>
-                <c:ptCount val="4"/>
-                <c:pt idx="0">
-                  <c:v>カテゴリ 1</c:v>
-                </c:pt>
-                <c:pt idx="1">
-                  <c:v>カテゴリ 2</c:v>
-                </c:pt>
-                <c:pt idx="2">
-                  <c:v>カテゴリ 3</c:v>
-                </c:pt>
-                <c:pt idx="3">
-                  <c:v>カテゴリ 4</c:v>
-                </c:pt>
-              </c:strCache>
-            </c:strRef>
-          </c:cat>
-          <c:val>
-            <c:numRef>
-              <c:f>Sheet1!$C$2:$C$5</c:f>
-              <c:numCache>
-                <c:formatCode>General</c:formatCode>
-                <c:ptCount val="4"/>
-                <c:pt idx="0">
-                  <c:v>2.4</c:v>
-                </c:pt>
-                <c:pt idx="1">
-                  <c:v>4.4000000000000004</c:v>
-                </c:pt>
-                <c:pt idx="2">
-                  <c:v>1.8</c:v>
-                </c:pt>
-                <c:pt idx="3">
-                  <c:v>2.8</c:v>
-                </c:pt>
-              </c:numCache>
-            </c:numRef>
-          </c:val>
-          <c:extLst>
-            <c:ext xmlns:c16="http://schemas.microsoft.com/office/drawing/2014/chart" uri="{C3380CC4-5D6E-409C-BE32-E72D297353CC}">
-              <c16:uniqueId val="{00000001-CAD9-4586-ABF2-95F4B89BB020}"/>
-            </c:ext>
-          </c:extLst>
-        </c:ser>
-        <c:ser>
-          <c:idx val="2"/>
-          <c:order val="2"/>
-          <c:tx>
-            <c:v>TC32 系列名</c:v>
-          </c:tx>
-          <c:spPr>
-            <a:solidFill>
-              <a:schemeClr val="accent3"/>
-            </a:solidFill>
-            <a:ln>
-              <a:noFill/>
-            </a:ln>
-            <a:effectLst/>
-          </c:spPr>
-          <c:invertIfNegative val="0"/>
-          <c:cat>
-            <c:strRef>
-              <c:f>Sheet1!$A$2:$A$5</c:f>
-              <c:strCache>
-                <c:ptCount val="4"/>
-                <c:pt idx="0">
-                  <c:v>カテゴリ 1</c:v>
-                </c:pt>
-                <c:pt idx="1">
-                  <c:v>カテゴリ 2</c:v>
-                </c:pt>
-                <c:pt idx="2">
-                  <c:v>カテゴリ 3</c:v>
-                </c:pt>
-                <c:pt idx="3">
-                  <c:v>カテゴリ 4</c:v>
-                </c:pt>
-              </c:strCache>
-            </c:strRef>
-          </c:cat>
-          <c:val>
-            <c:numRef>
-              <c:f>Sheet1!$D$2:$D$5</c:f>
-              <c:numCache>
-                <c:formatCode>General</c:formatCode>
-                <c:ptCount val="4"/>
-                <c:pt idx="0">
-                  <c:v>2</c:v>
-                </c:pt>
-                <c:pt idx="1">
-                  <c:v>2</c:v>
-                </c:pt>
-                <c:pt idx="2">
-                  <c:v>3</c:v>
-                </c:pt>
-                <c:pt idx="3">
-                  <c:v>5</c:v>
-                </c:pt>
-              </c:numCache>
-            </c:numRef>
-          </c:val>
-          <c:extLst>
-            <c:ext xmlns:c16="http://schemas.microsoft.com/office/drawing/2014/chart" uri="{C3380CC4-5D6E-409C-BE32-E72D297353CC}">
-              <c16:uniqueId val="{00000002-CAD9-4586-ABF2-95F4B89BB020}"/>
+              <c16:uniqueId val="{00000000-8729-4CDB-974B-2E858F49BC39}"/>
             </c:ext>
           </c:extLst>
         </c:ser>
@@ -362,11 +236,11 @@
         </c:dLbls>
         <c:gapWidth val="219"/>
         <c:overlap val="-27"/>
-        <c:axId val="483753615"/>
-        <c:axId val="483754095"/>
+        <c:axId val="1393730143"/>
+        <c:axId val="1393726303"/>
       </c:barChart>
       <c:catAx>
-        <c:axId val="483753615"/>
+        <c:axId val="1393730143"/>
         <c:scaling>
           <c:orientation val="minMax"/>
         </c:scaling>
@@ -409,7 +283,7 @@
             <a:endParaRPr lang="ja-JP"/>
           </a:p>
         </c:txPr>
-        <c:crossAx val="483754095"/>
+        <c:crossAx val="1393726303"/>
         <c:crosses val="autoZero"/>
         <c:auto val="1"/>
         <c:lblAlgn val="ctr"/>
@@ -417,7 +291,7 @@
         <c:noMultiLvlLbl val="0"/>
       </c:catAx>
       <c:valAx>
-        <c:axId val="483754095"/>
+        <c:axId val="1393726303"/>
         <c:scaling>
           <c:orientation val="minMax"/>
         </c:scaling>
@@ -468,7 +342,7 @@
             <a:endParaRPr lang="ja-JP"/>
           </a:p>
         </c:txPr>
-        <c:crossAx val="483753615"/>
+        <c:crossAx val="1393730143"/>
         <c:crosses val="autoZero"/>
         <c:crossBetween val="between"/>
       </c:valAx>
@@ -1838,7 +1712,7 @@
 <file path=ppt/diagrams/data1.xml><?xml version="1.0" encoding="utf-8"?>
 <dgm:dataModel xmlns:dgm="http://schemas.openxmlformats.org/drawingml/2006/diagram" xmlns:a="http://schemas.openxmlformats.org/drawingml/2006/main">
   <dgm:ptLst>
-    <dgm:pt modelId="{93D52F23-63FF-41C1-9CE9-E3CE7B11C33D}" type="doc">
+    <dgm:pt modelId="{7B6B3D2D-2605-44B1-B1F3-A8FB28A162D2}" type="doc">
       <dgm:prSet loTypeId="urn:microsoft.com/office/officeart/2005/8/layout/default" loCatId="list" qsTypeId="urn:microsoft.com/office/officeart/2005/8/quickstyle/simple1" qsCatId="simple" csTypeId="urn:microsoft.com/office/officeart/2005/8/colors/accent1_2" csCatId="accent1" phldr="1"/>
       <dgm:spPr/>
       <dgm:t>
@@ -1849,7 +1723,7 @@
         </a:p>
       </dgm:t>
     </dgm:pt>
-    <dgm:pt modelId="{F58FE04E-186D-4ABF-BFE7-014B02FBFE06}">
+    <dgm:pt modelId="{0BFCDA5E-FC38-41BE-B222-094B2144CAEE}">
       <dgm:prSet phldrT="[テキスト]"/>
       <dgm:spPr/>
       <dgm:t>
@@ -1867,7 +1741,7 @@
         </a:p>
       </dgm:t>
     </dgm:pt>
-    <dgm:pt modelId="{E5678D95-C43E-4D0E-A5DF-E15F959E5D0B}" type="parTrans" cxnId="{FCDB2CAA-338B-4964-AED0-99A3440BA7E8}">
+    <dgm:pt modelId="{A880EBEE-782C-470F-9DD9-D1D9E1239FE2}" type="parTrans" cxnId="{518B9506-C0CC-4A33-B695-BEB4E18519FC}">
       <dgm:prSet/>
       <dgm:spPr/>
       <dgm:t>
@@ -1878,7 +1752,7 @@
         </a:p>
       </dgm:t>
     </dgm:pt>
-    <dgm:pt modelId="{73DB424A-F251-4A73-9D1F-DD9CF9B57221}" type="sibTrans" cxnId="{FCDB2CAA-338B-4964-AED0-99A3440BA7E8}">
+    <dgm:pt modelId="{61C35AFD-CF3C-4E6D-B0CD-21CFFAE9A27F}" type="sibTrans" cxnId="{518B9506-C0CC-4A33-B695-BEB4E18519FC}">
       <dgm:prSet/>
       <dgm:spPr/>
       <dgm:t>
@@ -1889,7 +1763,7 @@
         </a:p>
       </dgm:t>
     </dgm:pt>
-    <dgm:pt modelId="{10DB52B9-2BB1-418F-B6F9-9FBCD007FA4E}">
+    <dgm:pt modelId="{06B0EF80-75BF-4570-9FDD-909651EC7884}">
       <dgm:prSet phldrT="[テキスト]" phldr="1"/>
       <dgm:spPr/>
       <dgm:t>
@@ -1900,7 +1774,7 @@
         </a:p>
       </dgm:t>
     </dgm:pt>
-    <dgm:pt modelId="{9138DFCE-E9AA-45DC-BCE8-CD7115420518}" type="parTrans" cxnId="{1953A5B8-2ABD-40A4-A518-3EF83DEC5C3C}">
+    <dgm:pt modelId="{D04D3028-3390-41B4-B61E-7CEE7424971A}" type="parTrans" cxnId="{55E29367-19FE-4EEA-AD1D-9527FD9BBE21}">
       <dgm:prSet/>
       <dgm:spPr/>
       <dgm:t>
@@ -1911,7 +1785,7 @@
         </a:p>
       </dgm:t>
     </dgm:pt>
-    <dgm:pt modelId="{947DF30C-F925-474D-875C-2161E46F4108}" type="sibTrans" cxnId="{1953A5B8-2ABD-40A4-A518-3EF83DEC5C3C}">
+    <dgm:pt modelId="{7CEAB281-3661-4797-84C2-CFD40F151490}" type="sibTrans" cxnId="{55E29367-19FE-4EEA-AD1D-9527FD9BBE21}">
       <dgm:prSet/>
       <dgm:spPr/>
       <dgm:t>
@@ -1922,7 +1796,7 @@
         </a:p>
       </dgm:t>
     </dgm:pt>
-    <dgm:pt modelId="{6B3C7994-3B02-4151-B85C-02DF8F3C6E26}">
+    <dgm:pt modelId="{B08C5292-916B-4A35-87E5-44ECBB8AF80B}">
       <dgm:prSet phldrT="[テキスト]" phldr="1"/>
       <dgm:spPr/>
       <dgm:t>
@@ -1933,7 +1807,7 @@
         </a:p>
       </dgm:t>
     </dgm:pt>
-    <dgm:pt modelId="{0D40142B-D41F-4108-898F-3091B32059C8}" type="parTrans" cxnId="{F0B42EFE-525E-49F1-B70E-96387712FBB3}">
+    <dgm:pt modelId="{9ACDB6C0-6876-4954-B3EE-1D6B939E20E5}" type="parTrans" cxnId="{96D284B7-19F1-4986-AE29-A2F4732CDDC0}">
       <dgm:prSet/>
       <dgm:spPr/>
       <dgm:t>
@@ -1944,7 +1818,7 @@
         </a:p>
       </dgm:t>
     </dgm:pt>
-    <dgm:pt modelId="{8C938E51-F4C0-4BAC-BF23-1F7217DBBE39}" type="sibTrans" cxnId="{F0B42EFE-525E-49F1-B70E-96387712FBB3}">
+    <dgm:pt modelId="{798AB734-6BDC-4F4F-8C18-B2526492F5DF}" type="sibTrans" cxnId="{96D284B7-19F1-4986-AE29-A2F4732CDDC0}">
       <dgm:prSet/>
       <dgm:spPr/>
       <dgm:t>
@@ -1955,7 +1829,7 @@
         </a:p>
       </dgm:t>
     </dgm:pt>
-    <dgm:pt modelId="{82B6E7E5-589E-4569-B4A4-E13186750849}">
+    <dgm:pt modelId="{2A48B776-70BB-4671-94B2-AA2CDC20E358}">
       <dgm:prSet phldrT="[テキスト]" phldr="1"/>
       <dgm:spPr/>
       <dgm:t>
@@ -1966,7 +1840,7 @@
         </a:p>
       </dgm:t>
     </dgm:pt>
-    <dgm:pt modelId="{809E13FA-4F18-48B8-9F18-45178B0E9486}" type="parTrans" cxnId="{B1871BD6-2E8E-4CAF-9B04-B467DE870538}">
+    <dgm:pt modelId="{B43DC585-D980-4F8F-B84A-200312A521B6}" type="parTrans" cxnId="{9C2B4FB9-74FE-4C81-8571-5549040BD1A0}">
       <dgm:prSet/>
       <dgm:spPr/>
       <dgm:t>
@@ -1977,7 +1851,7 @@
         </a:p>
       </dgm:t>
     </dgm:pt>
-    <dgm:pt modelId="{ABA87E7D-1B40-4BE3-9115-24ACA38725DF}" type="sibTrans" cxnId="{B1871BD6-2E8E-4CAF-9B04-B467DE870538}">
+    <dgm:pt modelId="{381DD5C3-3CEA-4CE0-9833-B3705BAD255C}" type="sibTrans" cxnId="{9C2B4FB9-74FE-4C81-8571-5549040BD1A0}">
       <dgm:prSet/>
       <dgm:spPr/>
       <dgm:t>
@@ -1988,7 +1862,7 @@
         </a:p>
       </dgm:t>
     </dgm:pt>
-    <dgm:pt modelId="{B4CB027F-3B28-42C0-956E-81638357B218}">
+    <dgm:pt modelId="{3C5A4E05-77F4-4C70-8743-F2C2927933D4}">
       <dgm:prSet phldrT="[テキスト]" phldr="1"/>
       <dgm:spPr/>
       <dgm:t>
@@ -1999,7 +1873,7 @@
         </a:p>
       </dgm:t>
     </dgm:pt>
-    <dgm:pt modelId="{E7F4108E-D801-42E3-B1DC-615D3C99102E}" type="parTrans" cxnId="{EDD4BC9F-7C98-4DC2-A536-3D39671E2825}">
+    <dgm:pt modelId="{B8CD07D0-9731-4BC5-AD99-7FE5ABDA206B}" type="parTrans" cxnId="{42096849-DB7F-441B-BD53-2768E07168CB}">
       <dgm:prSet/>
       <dgm:spPr/>
       <dgm:t>
@@ -2010,7 +1884,7 @@
         </a:p>
       </dgm:t>
     </dgm:pt>
-    <dgm:pt modelId="{D1DDBFDE-5FC9-4378-872E-DEBB2E420144}" type="sibTrans" cxnId="{EDD4BC9F-7C98-4DC2-A536-3D39671E2825}">
+    <dgm:pt modelId="{87C01FDF-AEC7-4C1F-AD25-9A6D4F80274C}" type="sibTrans" cxnId="{42096849-DB7F-441B-BD53-2768E07168CB}">
       <dgm:prSet/>
       <dgm:spPr/>
       <dgm:t>
@@ -2021,8 +1895,8 @@
         </a:p>
       </dgm:t>
     </dgm:pt>
-    <dgm:pt modelId="{E5A1E95A-56BF-473D-8AD1-C9A6659007E4}" type="pres">
-      <dgm:prSet presAssocID="{93D52F23-63FF-41C1-9CE9-E3CE7B11C33D}" presName="diagram" presStyleCnt="0">
+    <dgm:pt modelId="{3F83853A-7C4C-42C2-A355-B5BB875D4675}" type="pres">
+      <dgm:prSet presAssocID="{7B6B3D2D-2605-44B1-B1F3-A8FB28A162D2}" presName="diagram" presStyleCnt="0">
         <dgm:presLayoutVars>
           <dgm:dir/>
           <dgm:resizeHandles val="exact"/>
@@ -2030,56 +1904,56 @@
       </dgm:prSet>
       <dgm:spPr/>
     </dgm:pt>
-    <dgm:pt modelId="{DD9857FD-2048-4C77-ACEB-DFD1BEF8B37A}" type="pres">
-      <dgm:prSet presAssocID="{F58FE04E-186D-4ABF-BFE7-014B02FBFE06}" presName="node" presStyleLbl="node1" presStyleIdx="0" presStyleCnt="5">
+    <dgm:pt modelId="{56D441AD-D5AD-4EBB-965C-1D8BEB9204E0}" type="pres">
+      <dgm:prSet presAssocID="{0BFCDA5E-FC38-41BE-B222-094B2144CAEE}" presName="node" presStyleLbl="node1" presStyleIdx="0" presStyleCnt="5">
         <dgm:presLayoutVars>
           <dgm:bulletEnabled val="1"/>
         </dgm:presLayoutVars>
       </dgm:prSet>
       <dgm:spPr/>
     </dgm:pt>
-    <dgm:pt modelId="{9B07A5E0-BD91-47B3-9708-2D2E8D36A8F0}" type="pres">
-      <dgm:prSet presAssocID="{73DB424A-F251-4A73-9D1F-DD9CF9B57221}" presName="sibTrans" presStyleCnt="0"/>
+    <dgm:pt modelId="{85AB85E5-6ECB-4B9B-BE0E-6A42F10279D8}" type="pres">
+      <dgm:prSet presAssocID="{61C35AFD-CF3C-4E6D-B0CD-21CFFAE9A27F}" presName="sibTrans" presStyleCnt="0"/>
       <dgm:spPr/>
     </dgm:pt>
-    <dgm:pt modelId="{4E1A7B7E-26F5-4CD8-92A2-756CA2670423}" type="pres">
-      <dgm:prSet presAssocID="{10DB52B9-2BB1-418F-B6F9-9FBCD007FA4E}" presName="node" presStyleLbl="node1" presStyleIdx="1" presStyleCnt="5">
+    <dgm:pt modelId="{8AF15660-6CF6-46E6-B05E-3CC587A92AEC}" type="pres">
+      <dgm:prSet presAssocID="{06B0EF80-75BF-4570-9FDD-909651EC7884}" presName="node" presStyleLbl="node1" presStyleIdx="1" presStyleCnt="5">
         <dgm:presLayoutVars>
           <dgm:bulletEnabled val="1"/>
         </dgm:presLayoutVars>
       </dgm:prSet>
       <dgm:spPr/>
     </dgm:pt>
-    <dgm:pt modelId="{A46D4C81-7510-4F81-86B7-D4A0DBD9C97D}" type="pres">
-      <dgm:prSet presAssocID="{947DF30C-F925-474D-875C-2161E46F4108}" presName="sibTrans" presStyleCnt="0"/>
+    <dgm:pt modelId="{BE3A4B85-F0F4-4843-823B-AD1B92247207}" type="pres">
+      <dgm:prSet presAssocID="{7CEAB281-3661-4797-84C2-CFD40F151490}" presName="sibTrans" presStyleCnt="0"/>
       <dgm:spPr/>
     </dgm:pt>
-    <dgm:pt modelId="{311B3D5D-5FB7-4187-8DDF-91478D7EF290}" type="pres">
-      <dgm:prSet presAssocID="{6B3C7994-3B02-4151-B85C-02DF8F3C6E26}" presName="node" presStyleLbl="node1" presStyleIdx="2" presStyleCnt="5">
+    <dgm:pt modelId="{FCD48BC9-D6BC-42FB-97EC-5FD4D5764B17}" type="pres">
+      <dgm:prSet presAssocID="{B08C5292-916B-4A35-87E5-44ECBB8AF80B}" presName="node" presStyleLbl="node1" presStyleIdx="2" presStyleCnt="5">
         <dgm:presLayoutVars>
           <dgm:bulletEnabled val="1"/>
         </dgm:presLayoutVars>
       </dgm:prSet>
       <dgm:spPr/>
     </dgm:pt>
-    <dgm:pt modelId="{62325C8B-0D92-41C0-98B3-3F94670AE21E}" type="pres">
-      <dgm:prSet presAssocID="{8C938E51-F4C0-4BAC-BF23-1F7217DBBE39}" presName="sibTrans" presStyleCnt="0"/>
+    <dgm:pt modelId="{0BA11DA9-7E5A-4788-95B6-17C26EBA0E81}" type="pres">
+      <dgm:prSet presAssocID="{798AB734-6BDC-4F4F-8C18-B2526492F5DF}" presName="sibTrans" presStyleCnt="0"/>
       <dgm:spPr/>
     </dgm:pt>
-    <dgm:pt modelId="{73C24F9C-82E1-4269-A13D-A8ABAF062413}" type="pres">
-      <dgm:prSet presAssocID="{82B6E7E5-589E-4569-B4A4-E13186750849}" presName="node" presStyleLbl="node1" presStyleIdx="3" presStyleCnt="5">
+    <dgm:pt modelId="{159F0E7E-D862-473E-A48D-56A6D25C6DA4}" type="pres">
+      <dgm:prSet presAssocID="{2A48B776-70BB-4671-94B2-AA2CDC20E358}" presName="node" presStyleLbl="node1" presStyleIdx="3" presStyleCnt="5">
         <dgm:presLayoutVars>
           <dgm:bulletEnabled val="1"/>
         </dgm:presLayoutVars>
       </dgm:prSet>
       <dgm:spPr/>
     </dgm:pt>
-    <dgm:pt modelId="{8572F554-2CDB-4821-B0FE-E2EAF34449A7}" type="pres">
-      <dgm:prSet presAssocID="{ABA87E7D-1B40-4BE3-9115-24ACA38725DF}" presName="sibTrans" presStyleCnt="0"/>
+    <dgm:pt modelId="{9AF34ED4-F87C-4AF8-ABCE-6A6CBC0A345D}" type="pres">
+      <dgm:prSet presAssocID="{381DD5C3-3CEA-4CE0-9833-B3705BAD255C}" presName="sibTrans" presStyleCnt="0"/>
       <dgm:spPr/>
     </dgm:pt>
-    <dgm:pt modelId="{0FEE32C2-2478-4D83-B5DE-166E7766DB1B}" type="pres">
-      <dgm:prSet presAssocID="{B4CB027F-3B28-42C0-956E-81638357B218}" presName="node" presStyleLbl="node1" presStyleIdx="4" presStyleCnt="5">
+    <dgm:pt modelId="{9FF6F16C-4885-474B-BDB4-383429414002}" type="pres">
+      <dgm:prSet presAssocID="{3C5A4E05-77F4-4C70-8743-F2C2927933D4}" presName="node" presStyleLbl="node1" presStyleIdx="4" presStyleCnt="5">
         <dgm:presLayoutVars>
           <dgm:bulletEnabled val="1"/>
         </dgm:presLayoutVars>
@@ -2088,26 +1962,26 @@
     </dgm:pt>
   </dgm:ptLst>
   <dgm:cxnLst>
-    <dgm:cxn modelId="{236FAF62-6438-4B6F-9964-E4CD3126277A}" type="presOf" srcId="{82B6E7E5-589E-4569-B4A4-E13186750849}" destId="{73C24F9C-82E1-4269-A13D-A8ABAF062413}" srcOrd="0" destOrd="0" presId="urn:microsoft.com/office/officeart/2005/8/layout/default"/>
-    <dgm:cxn modelId="{BAEA2D68-0C73-47FE-A901-B8D0FE43492A}" type="presOf" srcId="{10DB52B9-2BB1-418F-B6F9-9FBCD007FA4E}" destId="{4E1A7B7E-26F5-4CD8-92A2-756CA2670423}" srcOrd="0" destOrd="0" presId="urn:microsoft.com/office/officeart/2005/8/layout/default"/>
-    <dgm:cxn modelId="{B93A2E4D-B6D4-473F-AF52-4EBDBFBC643F}" type="presOf" srcId="{6B3C7994-3B02-4151-B85C-02DF8F3C6E26}" destId="{311B3D5D-5FB7-4187-8DDF-91478D7EF290}" srcOrd="0" destOrd="0" presId="urn:microsoft.com/office/officeart/2005/8/layout/default"/>
-    <dgm:cxn modelId="{8532A17F-94E4-4F74-B7BF-1CD8F6722881}" type="presOf" srcId="{F58FE04E-186D-4ABF-BFE7-014B02FBFE06}" destId="{DD9857FD-2048-4C77-ACEB-DFD1BEF8B37A}" srcOrd="0" destOrd="0" presId="urn:microsoft.com/office/officeart/2005/8/layout/default"/>
-    <dgm:cxn modelId="{7740C07F-37D5-414E-BDB6-939E0AEB45ED}" type="presOf" srcId="{B4CB027F-3B28-42C0-956E-81638357B218}" destId="{0FEE32C2-2478-4D83-B5DE-166E7766DB1B}" srcOrd="0" destOrd="0" presId="urn:microsoft.com/office/officeart/2005/8/layout/default"/>
-    <dgm:cxn modelId="{EDD4BC9F-7C98-4DC2-A536-3D39671E2825}" srcId="{93D52F23-63FF-41C1-9CE9-E3CE7B11C33D}" destId="{B4CB027F-3B28-42C0-956E-81638357B218}" srcOrd="4" destOrd="0" parTransId="{E7F4108E-D801-42E3-B1DC-615D3C99102E}" sibTransId="{D1DDBFDE-5FC9-4378-872E-DEBB2E420144}"/>
-    <dgm:cxn modelId="{FCDB2CAA-338B-4964-AED0-99A3440BA7E8}" srcId="{93D52F23-63FF-41C1-9CE9-E3CE7B11C33D}" destId="{F58FE04E-186D-4ABF-BFE7-014B02FBFE06}" srcOrd="0" destOrd="0" parTransId="{E5678D95-C43E-4D0E-A5DF-E15F959E5D0B}" sibTransId="{73DB424A-F251-4A73-9D1F-DD9CF9B57221}"/>
-    <dgm:cxn modelId="{1953A5B8-2ABD-40A4-A518-3EF83DEC5C3C}" srcId="{93D52F23-63FF-41C1-9CE9-E3CE7B11C33D}" destId="{10DB52B9-2BB1-418F-B6F9-9FBCD007FA4E}" srcOrd="1" destOrd="0" parTransId="{9138DFCE-E9AA-45DC-BCE8-CD7115420518}" sibTransId="{947DF30C-F925-474D-875C-2161E46F4108}"/>
-    <dgm:cxn modelId="{B1871BD6-2E8E-4CAF-9B04-B467DE870538}" srcId="{93D52F23-63FF-41C1-9CE9-E3CE7B11C33D}" destId="{82B6E7E5-589E-4569-B4A4-E13186750849}" srcOrd="3" destOrd="0" parTransId="{809E13FA-4F18-48B8-9F18-45178B0E9486}" sibTransId="{ABA87E7D-1B40-4BE3-9115-24ACA38725DF}"/>
-    <dgm:cxn modelId="{BE23FBE1-82E7-41C1-9BE5-C6E4459B0520}" type="presOf" srcId="{93D52F23-63FF-41C1-9CE9-E3CE7B11C33D}" destId="{E5A1E95A-56BF-473D-8AD1-C9A6659007E4}" srcOrd="0" destOrd="0" presId="urn:microsoft.com/office/officeart/2005/8/layout/default"/>
-    <dgm:cxn modelId="{F0B42EFE-525E-49F1-B70E-96387712FBB3}" srcId="{93D52F23-63FF-41C1-9CE9-E3CE7B11C33D}" destId="{6B3C7994-3B02-4151-B85C-02DF8F3C6E26}" srcOrd="2" destOrd="0" parTransId="{0D40142B-D41F-4108-898F-3091B32059C8}" sibTransId="{8C938E51-F4C0-4BAC-BF23-1F7217DBBE39}"/>
-    <dgm:cxn modelId="{7063B12A-9A9E-4D9A-9EBD-2E39343FD062}" type="presParOf" srcId="{E5A1E95A-56BF-473D-8AD1-C9A6659007E4}" destId="{DD9857FD-2048-4C77-ACEB-DFD1BEF8B37A}" srcOrd="0" destOrd="0" presId="urn:microsoft.com/office/officeart/2005/8/layout/default"/>
-    <dgm:cxn modelId="{6A601241-8930-489A-B95D-2B99213E6BE0}" type="presParOf" srcId="{E5A1E95A-56BF-473D-8AD1-C9A6659007E4}" destId="{9B07A5E0-BD91-47B3-9708-2D2E8D36A8F0}" srcOrd="1" destOrd="0" presId="urn:microsoft.com/office/officeart/2005/8/layout/default"/>
-    <dgm:cxn modelId="{26675214-0EE7-4097-B695-8CD67492A31F}" type="presParOf" srcId="{E5A1E95A-56BF-473D-8AD1-C9A6659007E4}" destId="{4E1A7B7E-26F5-4CD8-92A2-756CA2670423}" srcOrd="2" destOrd="0" presId="urn:microsoft.com/office/officeart/2005/8/layout/default"/>
-    <dgm:cxn modelId="{33261FF6-F4F9-49AB-BA32-6FBE75D9B3FA}" type="presParOf" srcId="{E5A1E95A-56BF-473D-8AD1-C9A6659007E4}" destId="{A46D4C81-7510-4F81-86B7-D4A0DBD9C97D}" srcOrd="3" destOrd="0" presId="urn:microsoft.com/office/officeart/2005/8/layout/default"/>
-    <dgm:cxn modelId="{0D62C7A7-F7D7-4EDB-B02C-996CCA9FBC98}" type="presParOf" srcId="{E5A1E95A-56BF-473D-8AD1-C9A6659007E4}" destId="{311B3D5D-5FB7-4187-8DDF-91478D7EF290}" srcOrd="4" destOrd="0" presId="urn:microsoft.com/office/officeart/2005/8/layout/default"/>
-    <dgm:cxn modelId="{5D03E2CC-24A0-435C-A5E8-6ECCB5C13BCF}" type="presParOf" srcId="{E5A1E95A-56BF-473D-8AD1-C9A6659007E4}" destId="{62325C8B-0D92-41C0-98B3-3F94670AE21E}" srcOrd="5" destOrd="0" presId="urn:microsoft.com/office/officeart/2005/8/layout/default"/>
-    <dgm:cxn modelId="{095682FB-D2D7-4581-BE8A-BC6493BC2523}" type="presParOf" srcId="{E5A1E95A-56BF-473D-8AD1-C9A6659007E4}" destId="{73C24F9C-82E1-4269-A13D-A8ABAF062413}" srcOrd="6" destOrd="0" presId="urn:microsoft.com/office/officeart/2005/8/layout/default"/>
-    <dgm:cxn modelId="{782661A2-6FBA-42BB-88DF-F648AE892A8C}" type="presParOf" srcId="{E5A1E95A-56BF-473D-8AD1-C9A6659007E4}" destId="{8572F554-2CDB-4821-B0FE-E2EAF34449A7}" srcOrd="7" destOrd="0" presId="urn:microsoft.com/office/officeart/2005/8/layout/default"/>
-    <dgm:cxn modelId="{D2DB55DE-E48E-4BCD-B16F-7659652AC668}" type="presParOf" srcId="{E5A1E95A-56BF-473D-8AD1-C9A6659007E4}" destId="{0FEE32C2-2478-4D83-B5DE-166E7766DB1B}" srcOrd="8" destOrd="0" presId="urn:microsoft.com/office/officeart/2005/8/layout/default"/>
+    <dgm:cxn modelId="{518B9506-C0CC-4A33-B695-BEB4E18519FC}" srcId="{7B6B3D2D-2605-44B1-B1F3-A8FB28A162D2}" destId="{0BFCDA5E-FC38-41BE-B222-094B2144CAEE}" srcOrd="0" destOrd="0" parTransId="{A880EBEE-782C-470F-9DD9-D1D9E1239FE2}" sibTransId="{61C35AFD-CF3C-4E6D-B0CD-21CFFAE9A27F}"/>
+    <dgm:cxn modelId="{0D61DA0C-3426-414E-9816-5BBE0418F01E}" type="presOf" srcId="{3C5A4E05-77F4-4C70-8743-F2C2927933D4}" destId="{9FF6F16C-4885-474B-BDB4-383429414002}" srcOrd="0" destOrd="0" presId="urn:microsoft.com/office/officeart/2005/8/layout/default"/>
+    <dgm:cxn modelId="{8397C019-123A-451F-B7A3-D07C2876ADA6}" type="presOf" srcId="{0BFCDA5E-FC38-41BE-B222-094B2144CAEE}" destId="{56D441AD-D5AD-4EBB-965C-1D8BEB9204E0}" srcOrd="0" destOrd="0" presId="urn:microsoft.com/office/officeart/2005/8/layout/default"/>
+    <dgm:cxn modelId="{906C8146-6DC0-4875-A2A9-BE34A09B2486}" type="presOf" srcId="{06B0EF80-75BF-4570-9FDD-909651EC7884}" destId="{8AF15660-6CF6-46E6-B05E-3CC587A92AEC}" srcOrd="0" destOrd="0" presId="urn:microsoft.com/office/officeart/2005/8/layout/default"/>
+    <dgm:cxn modelId="{55E29367-19FE-4EEA-AD1D-9527FD9BBE21}" srcId="{7B6B3D2D-2605-44B1-B1F3-A8FB28A162D2}" destId="{06B0EF80-75BF-4570-9FDD-909651EC7884}" srcOrd="1" destOrd="0" parTransId="{D04D3028-3390-41B4-B61E-7CEE7424971A}" sibTransId="{7CEAB281-3661-4797-84C2-CFD40F151490}"/>
+    <dgm:cxn modelId="{42096849-DB7F-441B-BD53-2768E07168CB}" srcId="{7B6B3D2D-2605-44B1-B1F3-A8FB28A162D2}" destId="{3C5A4E05-77F4-4C70-8743-F2C2927933D4}" srcOrd="4" destOrd="0" parTransId="{B8CD07D0-9731-4BC5-AD99-7FE5ABDA206B}" sibTransId="{87C01FDF-AEC7-4C1F-AD25-9A6D4F80274C}"/>
+    <dgm:cxn modelId="{BB050D7B-2A1B-4F29-B45D-BCA1F8136489}" type="presOf" srcId="{2A48B776-70BB-4671-94B2-AA2CDC20E358}" destId="{159F0E7E-D862-473E-A48D-56A6D25C6DA4}" srcOrd="0" destOrd="0" presId="urn:microsoft.com/office/officeart/2005/8/layout/default"/>
+    <dgm:cxn modelId="{4A296B98-38D2-49A4-AF6D-DAC1E7CCE8A4}" type="presOf" srcId="{B08C5292-916B-4A35-87E5-44ECBB8AF80B}" destId="{FCD48BC9-D6BC-42FB-97EC-5FD4D5764B17}" srcOrd="0" destOrd="0" presId="urn:microsoft.com/office/officeart/2005/8/layout/default"/>
+    <dgm:cxn modelId="{96D284B7-19F1-4986-AE29-A2F4732CDDC0}" srcId="{7B6B3D2D-2605-44B1-B1F3-A8FB28A162D2}" destId="{B08C5292-916B-4A35-87E5-44ECBB8AF80B}" srcOrd="2" destOrd="0" parTransId="{9ACDB6C0-6876-4954-B3EE-1D6B939E20E5}" sibTransId="{798AB734-6BDC-4F4F-8C18-B2526492F5DF}"/>
+    <dgm:cxn modelId="{9C2B4FB9-74FE-4C81-8571-5549040BD1A0}" srcId="{7B6B3D2D-2605-44B1-B1F3-A8FB28A162D2}" destId="{2A48B776-70BB-4671-94B2-AA2CDC20E358}" srcOrd="3" destOrd="0" parTransId="{B43DC585-D980-4F8F-B84A-200312A521B6}" sibTransId="{381DD5C3-3CEA-4CE0-9833-B3705BAD255C}"/>
+    <dgm:cxn modelId="{E6E51DDA-B190-438E-9624-B76295D11E58}" type="presOf" srcId="{7B6B3D2D-2605-44B1-B1F3-A8FB28A162D2}" destId="{3F83853A-7C4C-42C2-A355-B5BB875D4675}" srcOrd="0" destOrd="0" presId="urn:microsoft.com/office/officeart/2005/8/layout/default"/>
+    <dgm:cxn modelId="{D08BD87A-9146-4B56-9374-E23226011428}" type="presParOf" srcId="{3F83853A-7C4C-42C2-A355-B5BB875D4675}" destId="{56D441AD-D5AD-4EBB-965C-1D8BEB9204E0}" srcOrd="0" destOrd="0" presId="urn:microsoft.com/office/officeart/2005/8/layout/default"/>
+    <dgm:cxn modelId="{E2556FA7-D2CB-40C1-B34D-12D3070B3509}" type="presParOf" srcId="{3F83853A-7C4C-42C2-A355-B5BB875D4675}" destId="{85AB85E5-6ECB-4B9B-BE0E-6A42F10279D8}" srcOrd="1" destOrd="0" presId="urn:microsoft.com/office/officeart/2005/8/layout/default"/>
+    <dgm:cxn modelId="{F7D2108E-BBE4-4AC1-9951-A47FE9749674}" type="presParOf" srcId="{3F83853A-7C4C-42C2-A355-B5BB875D4675}" destId="{8AF15660-6CF6-46E6-B05E-3CC587A92AEC}" srcOrd="2" destOrd="0" presId="urn:microsoft.com/office/officeart/2005/8/layout/default"/>
+    <dgm:cxn modelId="{F1674B54-13B9-41A2-9A4B-C182B46BFABD}" type="presParOf" srcId="{3F83853A-7C4C-42C2-A355-B5BB875D4675}" destId="{BE3A4B85-F0F4-4843-823B-AD1B92247207}" srcOrd="3" destOrd="0" presId="urn:microsoft.com/office/officeart/2005/8/layout/default"/>
+    <dgm:cxn modelId="{5034E9A2-343F-46D7-8BF7-C0EBEDBDCA1F}" type="presParOf" srcId="{3F83853A-7C4C-42C2-A355-B5BB875D4675}" destId="{FCD48BC9-D6BC-42FB-97EC-5FD4D5764B17}" srcOrd="4" destOrd="0" presId="urn:microsoft.com/office/officeart/2005/8/layout/default"/>
+    <dgm:cxn modelId="{BBE6526D-3DA4-40A1-9370-A966F8B20636}" type="presParOf" srcId="{3F83853A-7C4C-42C2-A355-B5BB875D4675}" destId="{0BA11DA9-7E5A-4788-95B6-17C26EBA0E81}" srcOrd="5" destOrd="0" presId="urn:microsoft.com/office/officeart/2005/8/layout/default"/>
+    <dgm:cxn modelId="{E418ADA5-24E8-4738-8A5D-03FD545B0A66}" type="presParOf" srcId="{3F83853A-7C4C-42C2-A355-B5BB875D4675}" destId="{159F0E7E-D862-473E-A48D-56A6D25C6DA4}" srcOrd="6" destOrd="0" presId="urn:microsoft.com/office/officeart/2005/8/layout/default"/>
+    <dgm:cxn modelId="{5A3B13A2-F259-48A0-82A4-43D9AE04A64A}" type="presParOf" srcId="{3F83853A-7C4C-42C2-A355-B5BB875D4675}" destId="{9AF34ED4-F87C-4AF8-ABCE-6A6CBC0A345D}" srcOrd="7" destOrd="0" presId="urn:microsoft.com/office/officeart/2005/8/layout/default"/>
+    <dgm:cxn modelId="{B15B9C81-FE7E-4ECB-AFD3-1FDBF04C28D0}" type="presParOf" srcId="{3F83853A-7C4C-42C2-A355-B5BB875D4675}" destId="{9FF6F16C-4885-474B-BDB4-383429414002}" srcOrd="8" destOrd="0" presId="urn:microsoft.com/office/officeart/2005/8/layout/default"/>
   </dgm:cxnLst>
   <dgm:bg/>
   <dgm:whole/>
@@ -2127,7 +2001,7 @@
       <dsp:cNvGrpSpPr/>
     </dsp:nvGrpSpPr>
     <dsp:grpSpPr/>
-    <dsp:sp modelId="{DD9857FD-2048-4C77-ACEB-DFD1BEF8B37A}">
+    <dsp:sp modelId="{56D441AD-D5AD-4EBB-965C-1D8BEB9204E0}">
       <dsp:nvSpPr>
         <dsp:cNvPr id="0" name=""/>
         <dsp:cNvSpPr/>
@@ -2209,7 +2083,7 @@
         <a:ext cx="1905000" cy="1143000"/>
       </dsp:txXfrm>
     </dsp:sp>
-    <dsp:sp modelId="{4E1A7B7E-26F5-4CD8-92A2-756CA2670423}">
+    <dsp:sp modelId="{8AF15660-6CF6-46E6-B05E-3CC587A92AEC}">
       <dsp:nvSpPr>
         <dsp:cNvPr id="0" name=""/>
         <dsp:cNvSpPr/>
@@ -2284,7 +2158,7 @@
         <a:ext cx="1905000" cy="1143000"/>
       </dsp:txXfrm>
     </dsp:sp>
-    <dsp:sp modelId="{311B3D5D-5FB7-4187-8DDF-91478D7EF290}">
+    <dsp:sp modelId="{FCD48BC9-D6BC-42FB-97EC-5FD4D5764B17}">
       <dsp:nvSpPr>
         <dsp:cNvPr id="0" name=""/>
         <dsp:cNvSpPr/>
@@ -2359,7 +2233,7 @@
         <a:ext cx="1905000" cy="1143000"/>
       </dsp:txXfrm>
     </dsp:sp>
-    <dsp:sp modelId="{73C24F9C-82E1-4269-A13D-A8ABAF062413}">
+    <dsp:sp modelId="{159F0E7E-D862-473E-A48D-56A6D25C6DA4}">
       <dsp:nvSpPr>
         <dsp:cNvPr id="0" name=""/>
         <dsp:cNvSpPr/>
@@ -2434,7 +2308,7 @@
         <a:ext cx="1905000" cy="1143000"/>
       </dsp:txXfrm>
     </dsp:sp>
-    <dsp:sp modelId="{0FEE32C2-2478-4D83-B5DE-166E7766DB1B}">
+    <dsp:sp modelId="{9FF6F16C-4885-474B-BDB4-383429414002}">
       <dsp:nvSpPr>
         <dsp:cNvPr id="0" name=""/>
         <dsp:cNvSpPr/>
@@ -3716,7 +3590,7 @@
           <p:cNvPr id="2" name="タイトル 1">
             <a:extLst>
               <a:ext uri="{FF2B5EF4-FFF2-40B4-BE49-F238E27FC236}">
-                <a16:creationId xmlns:a16="http://schemas.microsoft.com/office/drawing/2014/main" id="{7A675AD4-192B-88B0-B192-2229A39D1E25}"/>
+                <a16:creationId xmlns:a16="http://schemas.microsoft.com/office/drawing/2014/main" id="{92F9411E-8DEA-FB40-EC59-33AACA8E6FD0}"/>
               </a:ext>
             </a:extLst>
           </p:cNvPr>
@@ -3753,7 +3627,7 @@
           <p:cNvPr id="3" name="字幕 2">
             <a:extLst>
               <a:ext uri="{FF2B5EF4-FFF2-40B4-BE49-F238E27FC236}">
-                <a16:creationId xmlns:a16="http://schemas.microsoft.com/office/drawing/2014/main" id="{121AA65F-D390-D931-CF4C-7DFD27908867}"/>
+                <a16:creationId xmlns:a16="http://schemas.microsoft.com/office/drawing/2014/main" id="{1F6393E6-34AE-5BE3-4E5B-6035A9EA3044}"/>
               </a:ext>
             </a:extLst>
           </p:cNvPr>
@@ -3823,7 +3697,7 @@
           <p:cNvPr id="4" name="日付プレースホルダー 3">
             <a:extLst>
               <a:ext uri="{FF2B5EF4-FFF2-40B4-BE49-F238E27FC236}">
-                <a16:creationId xmlns:a16="http://schemas.microsoft.com/office/drawing/2014/main" id="{BA129EBE-BFB9-9ED2-F26D-B63364E64C64}"/>
+                <a16:creationId xmlns:a16="http://schemas.microsoft.com/office/drawing/2014/main" id="{CE354058-4285-B131-3A25-25EEB5462768}"/>
               </a:ext>
             </a:extLst>
           </p:cNvPr>
@@ -3839,7 +3713,7 @@
           <a:bodyPr/>
           <a:lstStyle/>
           <a:p>
-            <a:fld id="{6885E1A7-2E4F-4DF4-92AE-9CEE25F77787}" type="datetimeFigureOut">
+            <a:fld id="{5942FA36-335F-4625-B2EA-E4A937428F27}" type="datetimeFigureOut">
               <a:rPr kumimoji="1" lang="ja-JP" altLang="en-US" smtClean="0"/>
               <a:t>2026/11/1</a:t>
             </a:fld>
@@ -3852,7 +3726,7 @@
           <p:cNvPr id="5" name="フッター プレースホルダー 4">
             <a:extLst>
               <a:ext uri="{FF2B5EF4-FFF2-40B4-BE49-F238E27FC236}">
-                <a16:creationId xmlns:a16="http://schemas.microsoft.com/office/drawing/2014/main" id="{71027D89-DC38-CD03-47E3-414083A5771A}"/>
+                <a16:creationId xmlns:a16="http://schemas.microsoft.com/office/drawing/2014/main" id="{DFA998CC-3166-641B-9CB2-6A662C38368C}"/>
               </a:ext>
             </a:extLst>
           </p:cNvPr>
@@ -3877,7 +3751,7 @@
           <p:cNvPr id="6" name="スライド番号プレースホルダー 5">
             <a:extLst>
               <a:ext uri="{FF2B5EF4-FFF2-40B4-BE49-F238E27FC236}">
-                <a16:creationId xmlns:a16="http://schemas.microsoft.com/office/drawing/2014/main" id="{728011AD-74CE-E016-47E1-F7CB8CC6A66A}"/>
+                <a16:creationId xmlns:a16="http://schemas.microsoft.com/office/drawing/2014/main" id="{C9AE3CCC-2BCC-F731-5320-065464E31CDF}"/>
               </a:ext>
             </a:extLst>
           </p:cNvPr>
@@ -3893,7 +3767,7 @@
           <a:bodyPr/>
           <a:lstStyle/>
           <a:p>
-            <a:fld id="{E7C10858-3222-4F13-839A-5A38B4D07059}" type="slidenum">
+            <a:fld id="{F142BB55-E2EF-4BBE-94B2-F4599AD45135}" type="slidenum">
               <a:rPr kumimoji="1" lang="ja-JP" altLang="en-US" smtClean="0"/>
               <a:t>‹#›</a:t>
             </a:fld>
@@ -3904,7 +3778,7 @@
     </p:spTree>
     <p:extLst>
       <p:ext uri="{BB962C8B-B14F-4D97-AF65-F5344CB8AC3E}">
-        <p14:creationId xmlns:p14="http://schemas.microsoft.com/office/powerpoint/2010/main" val="181421328"/>
+        <p14:creationId xmlns:p14="http://schemas.microsoft.com/office/powerpoint/2010/main" val="534607550"/>
       </p:ext>
     </p:extLst>
   </p:cSld>
@@ -3936,7 +3810,7 @@
           <p:cNvPr id="2" name="タイトル 1">
             <a:extLst>
               <a:ext uri="{FF2B5EF4-FFF2-40B4-BE49-F238E27FC236}">
-                <a16:creationId xmlns:a16="http://schemas.microsoft.com/office/drawing/2014/main" id="{84D4CFAC-C22F-3745-060E-20DD72A46479}"/>
+                <a16:creationId xmlns:a16="http://schemas.microsoft.com/office/drawing/2014/main" id="{086DC611-CEEF-06D3-EA03-064DE4DCA955}"/>
               </a:ext>
             </a:extLst>
           </p:cNvPr>
@@ -3964,7 +3838,7 @@
           <p:cNvPr id="3" name="縦書きテキスト プレースホルダー 2">
             <a:extLst>
               <a:ext uri="{FF2B5EF4-FFF2-40B4-BE49-F238E27FC236}">
-                <a16:creationId xmlns:a16="http://schemas.microsoft.com/office/drawing/2014/main" id="{99CA03D9-C2AA-926A-5FC6-74C2795B9660}"/>
+                <a16:creationId xmlns:a16="http://schemas.microsoft.com/office/drawing/2014/main" id="{D0BFDF2C-3017-B11B-B16E-5787BE9903CA}"/>
               </a:ext>
             </a:extLst>
           </p:cNvPr>
@@ -4053,7 +3927,7 @@
           <p:cNvPr id="4" name="日付プレースホルダー 3">
             <a:extLst>
               <a:ext uri="{FF2B5EF4-FFF2-40B4-BE49-F238E27FC236}">
-                <a16:creationId xmlns:a16="http://schemas.microsoft.com/office/drawing/2014/main" id="{63691F5C-8078-4914-77EE-FC47CE6AC27D}"/>
+                <a16:creationId xmlns:a16="http://schemas.microsoft.com/office/drawing/2014/main" id="{128D8779-A693-ECCA-1C66-A3350E7EC2AF}"/>
               </a:ext>
             </a:extLst>
           </p:cNvPr>
@@ -4069,7 +3943,7 @@
           <a:bodyPr/>
           <a:lstStyle/>
           <a:p>
-            <a:fld id="{6885E1A7-2E4F-4DF4-92AE-9CEE25F77787}" type="datetimeFigureOut">
+            <a:fld id="{5942FA36-335F-4625-B2EA-E4A937428F27}" type="datetimeFigureOut">
               <a:rPr kumimoji="1" lang="ja-JP" altLang="en-US" smtClean="0"/>
               <a:t>2026/11/1</a:t>
             </a:fld>
@@ -4082,7 +3956,7 @@
           <p:cNvPr id="5" name="フッター プレースホルダー 4">
             <a:extLst>
               <a:ext uri="{FF2B5EF4-FFF2-40B4-BE49-F238E27FC236}">
-                <a16:creationId xmlns:a16="http://schemas.microsoft.com/office/drawing/2014/main" id="{5278749D-347B-1F9F-0643-89A8ACBB733B}"/>
+                <a16:creationId xmlns:a16="http://schemas.microsoft.com/office/drawing/2014/main" id="{DC2530DB-0DB2-B765-D8CE-53A95E7B70CA}"/>
               </a:ext>
             </a:extLst>
           </p:cNvPr>
@@ -4107,7 +3981,7 @@
           <p:cNvPr id="6" name="スライド番号プレースホルダー 5">
             <a:extLst>
               <a:ext uri="{FF2B5EF4-FFF2-40B4-BE49-F238E27FC236}">
-                <a16:creationId xmlns:a16="http://schemas.microsoft.com/office/drawing/2014/main" id="{4689CA76-7374-EA24-9B7C-E49878B48D30}"/>
+                <a16:creationId xmlns:a16="http://schemas.microsoft.com/office/drawing/2014/main" id="{B81BB923-F2F0-8F02-1C82-A994B0CC1624}"/>
               </a:ext>
             </a:extLst>
           </p:cNvPr>
@@ -4123,7 +3997,7 @@
           <a:bodyPr/>
           <a:lstStyle/>
           <a:p>
-            <a:fld id="{E7C10858-3222-4F13-839A-5A38B4D07059}" type="slidenum">
+            <a:fld id="{F142BB55-E2EF-4BBE-94B2-F4599AD45135}" type="slidenum">
               <a:rPr kumimoji="1" lang="ja-JP" altLang="en-US" smtClean="0"/>
               <a:t>‹#›</a:t>
             </a:fld>
@@ -4134,7 +4008,7 @@
     </p:spTree>
     <p:extLst>
       <p:ext uri="{BB962C8B-B14F-4D97-AF65-F5344CB8AC3E}">
-        <p14:creationId xmlns:p14="http://schemas.microsoft.com/office/powerpoint/2010/main" val="2975799808"/>
+        <p14:creationId xmlns:p14="http://schemas.microsoft.com/office/powerpoint/2010/main" val="4095164453"/>
       </p:ext>
     </p:extLst>
   </p:cSld>
@@ -4166,7 +4040,7 @@
           <p:cNvPr id="2" name="縦書きタイトル 1">
             <a:extLst>
               <a:ext uri="{FF2B5EF4-FFF2-40B4-BE49-F238E27FC236}">
-                <a16:creationId xmlns:a16="http://schemas.microsoft.com/office/drawing/2014/main" id="{D10B3630-05BC-5E14-8A89-97F2AF923B9F}"/>
+                <a16:creationId xmlns:a16="http://schemas.microsoft.com/office/drawing/2014/main" id="{72D1EFC7-D07D-CAF4-3251-BC525A9FD8E6}"/>
               </a:ext>
             </a:extLst>
           </p:cNvPr>
@@ -4199,7 +4073,7 @@
           <p:cNvPr id="3" name="縦書きテキスト プレースホルダー 2">
             <a:extLst>
               <a:ext uri="{FF2B5EF4-FFF2-40B4-BE49-F238E27FC236}">
-                <a16:creationId xmlns:a16="http://schemas.microsoft.com/office/drawing/2014/main" id="{E8B37881-72AA-987E-5353-2CD8961DF293}"/>
+                <a16:creationId xmlns:a16="http://schemas.microsoft.com/office/drawing/2014/main" id="{50F49622-BE6F-D54C-D43B-DF21104D9622}"/>
               </a:ext>
             </a:extLst>
           </p:cNvPr>
@@ -4293,7 +4167,7 @@
           <p:cNvPr id="4" name="日付プレースホルダー 3">
             <a:extLst>
               <a:ext uri="{FF2B5EF4-FFF2-40B4-BE49-F238E27FC236}">
-                <a16:creationId xmlns:a16="http://schemas.microsoft.com/office/drawing/2014/main" id="{8016316A-A1B4-B256-73DE-413548FB14C9}"/>
+                <a16:creationId xmlns:a16="http://schemas.microsoft.com/office/drawing/2014/main" id="{249835EC-8816-0E81-6481-BF75BAB73D80}"/>
               </a:ext>
             </a:extLst>
           </p:cNvPr>
@@ -4309,7 +4183,7 @@
           <a:bodyPr/>
           <a:lstStyle/>
           <a:p>
-            <a:fld id="{6885E1A7-2E4F-4DF4-92AE-9CEE25F77787}" type="datetimeFigureOut">
+            <a:fld id="{5942FA36-335F-4625-B2EA-E4A937428F27}" type="datetimeFigureOut">
               <a:rPr kumimoji="1" lang="ja-JP" altLang="en-US" smtClean="0"/>
               <a:t>2026/11/1</a:t>
             </a:fld>
@@ -4322,7 +4196,7 @@
           <p:cNvPr id="5" name="フッター プレースホルダー 4">
             <a:extLst>
               <a:ext uri="{FF2B5EF4-FFF2-40B4-BE49-F238E27FC236}">
-                <a16:creationId xmlns:a16="http://schemas.microsoft.com/office/drawing/2014/main" id="{69C2DD45-2536-7D23-3DDB-851FE9F3592E}"/>
+                <a16:creationId xmlns:a16="http://schemas.microsoft.com/office/drawing/2014/main" id="{6309E6D5-90AE-A6B1-C268-D33B0E96C9FC}"/>
               </a:ext>
             </a:extLst>
           </p:cNvPr>
@@ -4347,7 +4221,7 @@
           <p:cNvPr id="6" name="スライド番号プレースホルダー 5">
             <a:extLst>
               <a:ext uri="{FF2B5EF4-FFF2-40B4-BE49-F238E27FC236}">
-                <a16:creationId xmlns:a16="http://schemas.microsoft.com/office/drawing/2014/main" id="{1B91B325-2102-C6C6-DBC9-83CA036A29B2}"/>
+                <a16:creationId xmlns:a16="http://schemas.microsoft.com/office/drawing/2014/main" id="{41160AF1-9F22-4EC3-C9A6-3603C9E790CC}"/>
               </a:ext>
             </a:extLst>
           </p:cNvPr>
@@ -4363,7 +4237,7 @@
           <a:bodyPr/>
           <a:lstStyle/>
           <a:p>
-            <a:fld id="{E7C10858-3222-4F13-839A-5A38B4D07059}" type="slidenum">
+            <a:fld id="{F142BB55-E2EF-4BBE-94B2-F4599AD45135}" type="slidenum">
               <a:rPr kumimoji="1" lang="ja-JP" altLang="en-US" smtClean="0"/>
               <a:t>‹#›</a:t>
             </a:fld>
@@ -4374,7 +4248,7 @@
     </p:spTree>
     <p:extLst>
       <p:ext uri="{BB962C8B-B14F-4D97-AF65-F5344CB8AC3E}">
-        <p14:creationId xmlns:p14="http://schemas.microsoft.com/office/powerpoint/2010/main" val="2932914321"/>
+        <p14:creationId xmlns:p14="http://schemas.microsoft.com/office/powerpoint/2010/main" val="2666307561"/>
       </p:ext>
     </p:extLst>
   </p:cSld>
@@ -4406,7 +4280,7 @@
           <p:cNvPr id="2" name="タイトル 1">
             <a:extLst>
               <a:ext uri="{FF2B5EF4-FFF2-40B4-BE49-F238E27FC236}">
-                <a16:creationId xmlns:a16="http://schemas.microsoft.com/office/drawing/2014/main" id="{6DAD7ADD-3F47-7667-52F5-32C19B758D9A}"/>
+                <a16:creationId xmlns:a16="http://schemas.microsoft.com/office/drawing/2014/main" id="{05C99D8E-4020-3F62-8BC1-0E77372D39B9}"/>
               </a:ext>
             </a:extLst>
           </p:cNvPr>
@@ -4434,7 +4308,7 @@
           <p:cNvPr id="3" name="コンテンツ プレースホルダー 2">
             <a:extLst>
               <a:ext uri="{FF2B5EF4-FFF2-40B4-BE49-F238E27FC236}">
-                <a16:creationId xmlns:a16="http://schemas.microsoft.com/office/drawing/2014/main" id="{E0CAA329-7380-BBAC-F961-1027E6992C9D}"/>
+                <a16:creationId xmlns:a16="http://schemas.microsoft.com/office/drawing/2014/main" id="{9BE8615E-7503-0742-D317-9094BF6F295C}"/>
               </a:ext>
             </a:extLst>
           </p:cNvPr>
@@ -4523,7 +4397,7 @@
           <p:cNvPr id="4" name="日付プレースホルダー 3">
             <a:extLst>
               <a:ext uri="{FF2B5EF4-FFF2-40B4-BE49-F238E27FC236}">
-                <a16:creationId xmlns:a16="http://schemas.microsoft.com/office/drawing/2014/main" id="{7F642A0D-992A-5E16-3744-3EAF67EBA0E0}"/>
+                <a16:creationId xmlns:a16="http://schemas.microsoft.com/office/drawing/2014/main" id="{F0D6D13D-6EE6-BB42-B8AF-44918426CF74}"/>
               </a:ext>
             </a:extLst>
           </p:cNvPr>
@@ -4539,7 +4413,7 @@
           <a:bodyPr/>
           <a:lstStyle/>
           <a:p>
-            <a:fld id="{6885E1A7-2E4F-4DF4-92AE-9CEE25F77787}" type="datetimeFigureOut">
+            <a:fld id="{5942FA36-335F-4625-B2EA-E4A937428F27}" type="datetimeFigureOut">
               <a:rPr kumimoji="1" lang="ja-JP" altLang="en-US" smtClean="0"/>
               <a:t>2026/11/1</a:t>
             </a:fld>
@@ -4552,7 +4426,7 @@
           <p:cNvPr id="5" name="フッター プレースホルダー 4">
             <a:extLst>
               <a:ext uri="{FF2B5EF4-FFF2-40B4-BE49-F238E27FC236}">
-                <a16:creationId xmlns:a16="http://schemas.microsoft.com/office/drawing/2014/main" id="{9CD905D0-E336-8172-F4B3-3EE816F923AA}"/>
+                <a16:creationId xmlns:a16="http://schemas.microsoft.com/office/drawing/2014/main" id="{BBCA64C1-FCCC-B6F7-DA2B-FD473A5A0A86}"/>
               </a:ext>
             </a:extLst>
           </p:cNvPr>
@@ -4577,7 +4451,7 @@
           <p:cNvPr id="6" name="スライド番号プレースホルダー 5">
             <a:extLst>
               <a:ext uri="{FF2B5EF4-FFF2-40B4-BE49-F238E27FC236}">
-                <a16:creationId xmlns:a16="http://schemas.microsoft.com/office/drawing/2014/main" id="{444F5F74-F54C-8067-2D97-93658E5BD124}"/>
+                <a16:creationId xmlns:a16="http://schemas.microsoft.com/office/drawing/2014/main" id="{1224A45C-2933-5E9C-07C1-89A4553A32A3}"/>
               </a:ext>
             </a:extLst>
           </p:cNvPr>
@@ -4593,7 +4467,7 @@
           <a:bodyPr/>
           <a:lstStyle/>
           <a:p>
-            <a:fld id="{E7C10858-3222-4F13-839A-5A38B4D07059}" type="slidenum">
+            <a:fld id="{F142BB55-E2EF-4BBE-94B2-F4599AD45135}" type="slidenum">
               <a:rPr kumimoji="1" lang="ja-JP" altLang="en-US" smtClean="0"/>
               <a:t>‹#›</a:t>
             </a:fld>
@@ -4604,7 +4478,7 @@
     </p:spTree>
     <p:extLst>
       <p:ext uri="{BB962C8B-B14F-4D97-AF65-F5344CB8AC3E}">
-        <p14:creationId xmlns:p14="http://schemas.microsoft.com/office/powerpoint/2010/main" val="4017969027"/>
+        <p14:creationId xmlns:p14="http://schemas.microsoft.com/office/powerpoint/2010/main" val="3190058717"/>
       </p:ext>
     </p:extLst>
   </p:cSld>
@@ -4636,7 +4510,7 @@
           <p:cNvPr id="2" name="タイトル 1">
             <a:extLst>
               <a:ext uri="{FF2B5EF4-FFF2-40B4-BE49-F238E27FC236}">
-                <a16:creationId xmlns:a16="http://schemas.microsoft.com/office/drawing/2014/main" id="{19EC499D-8538-B90A-5BE5-A369C3693C03}"/>
+                <a16:creationId xmlns:a16="http://schemas.microsoft.com/office/drawing/2014/main" id="{CCEB975D-57C1-7BA1-3EB6-73B34C8834B7}"/>
               </a:ext>
             </a:extLst>
           </p:cNvPr>
@@ -4673,7 +4547,7 @@
           <p:cNvPr id="3" name="テキスト プレースホルダー 2">
             <a:extLst>
               <a:ext uri="{FF2B5EF4-FFF2-40B4-BE49-F238E27FC236}">
-                <a16:creationId xmlns:a16="http://schemas.microsoft.com/office/drawing/2014/main" id="{5F1DB283-ADF4-A64A-6DDE-902EB81819F9}"/>
+                <a16:creationId xmlns:a16="http://schemas.microsoft.com/office/drawing/2014/main" id="{10E3DDAA-CAD5-9439-EC71-91CEC9E10505}"/>
               </a:ext>
             </a:extLst>
           </p:cNvPr>
@@ -4798,7 +4672,7 @@
           <p:cNvPr id="4" name="日付プレースホルダー 3">
             <a:extLst>
               <a:ext uri="{FF2B5EF4-FFF2-40B4-BE49-F238E27FC236}">
-                <a16:creationId xmlns:a16="http://schemas.microsoft.com/office/drawing/2014/main" id="{EAF811FA-8B17-CF0D-F1E3-17A76FE4B636}"/>
+                <a16:creationId xmlns:a16="http://schemas.microsoft.com/office/drawing/2014/main" id="{6E41E213-C81F-77FD-DB61-CB1EFE0B91B4}"/>
               </a:ext>
             </a:extLst>
           </p:cNvPr>
@@ -4814,7 +4688,7 @@
           <a:bodyPr/>
           <a:lstStyle/>
           <a:p>
-            <a:fld id="{6885E1A7-2E4F-4DF4-92AE-9CEE25F77787}" type="datetimeFigureOut">
+            <a:fld id="{5942FA36-335F-4625-B2EA-E4A937428F27}" type="datetimeFigureOut">
               <a:rPr kumimoji="1" lang="ja-JP" altLang="en-US" smtClean="0"/>
               <a:t>2026/11/1</a:t>
             </a:fld>
@@ -4827,7 +4701,7 @@
           <p:cNvPr id="5" name="フッター プレースホルダー 4">
             <a:extLst>
               <a:ext uri="{FF2B5EF4-FFF2-40B4-BE49-F238E27FC236}">
-                <a16:creationId xmlns:a16="http://schemas.microsoft.com/office/drawing/2014/main" id="{37BFC622-16E4-E599-BB93-E6F7A470F5CA}"/>
+                <a16:creationId xmlns:a16="http://schemas.microsoft.com/office/drawing/2014/main" id="{E9078224-9223-325D-3C43-8B7B0563DEB4}"/>
               </a:ext>
             </a:extLst>
           </p:cNvPr>
@@ -4852,7 +4726,7 @@
           <p:cNvPr id="6" name="スライド番号プレースホルダー 5">
             <a:extLst>
               <a:ext uri="{FF2B5EF4-FFF2-40B4-BE49-F238E27FC236}">
-                <a16:creationId xmlns:a16="http://schemas.microsoft.com/office/drawing/2014/main" id="{71F7B377-30B6-DDD6-47F9-4942DDDB3570}"/>
+                <a16:creationId xmlns:a16="http://schemas.microsoft.com/office/drawing/2014/main" id="{A958731D-3AB1-2ECC-AED6-EEC5AB3BFF0A}"/>
               </a:ext>
             </a:extLst>
           </p:cNvPr>
@@ -4868,7 +4742,7 @@
           <a:bodyPr/>
           <a:lstStyle/>
           <a:p>
-            <a:fld id="{E7C10858-3222-4F13-839A-5A38B4D07059}" type="slidenum">
+            <a:fld id="{F142BB55-E2EF-4BBE-94B2-F4599AD45135}" type="slidenum">
               <a:rPr kumimoji="1" lang="ja-JP" altLang="en-US" smtClean="0"/>
               <a:t>‹#›</a:t>
             </a:fld>
@@ -4879,7 +4753,7 @@
     </p:spTree>
     <p:extLst>
       <p:ext uri="{BB962C8B-B14F-4D97-AF65-F5344CB8AC3E}">
-        <p14:creationId xmlns:p14="http://schemas.microsoft.com/office/powerpoint/2010/main" val="3545413549"/>
+        <p14:creationId xmlns:p14="http://schemas.microsoft.com/office/powerpoint/2010/main" val="2810956963"/>
       </p:ext>
     </p:extLst>
   </p:cSld>
@@ -4911,7 +4785,7 @@
           <p:cNvPr id="2" name="タイトル 1">
             <a:extLst>
               <a:ext uri="{FF2B5EF4-FFF2-40B4-BE49-F238E27FC236}">
-                <a16:creationId xmlns:a16="http://schemas.microsoft.com/office/drawing/2014/main" id="{E5850230-7746-1BC1-D179-0355F5C137B0}"/>
+                <a16:creationId xmlns:a16="http://schemas.microsoft.com/office/drawing/2014/main" id="{9CF28EFF-6F2C-5FA5-6C1B-9B09513B2B32}"/>
               </a:ext>
             </a:extLst>
           </p:cNvPr>
@@ -4939,7 +4813,7 @@
           <p:cNvPr id="3" name="コンテンツ プレースホルダー 2">
             <a:extLst>
               <a:ext uri="{FF2B5EF4-FFF2-40B4-BE49-F238E27FC236}">
-                <a16:creationId xmlns:a16="http://schemas.microsoft.com/office/drawing/2014/main" id="{9ECD2EBB-9846-8A88-13DB-9FD7A5AE3BB3}"/>
+                <a16:creationId xmlns:a16="http://schemas.microsoft.com/office/drawing/2014/main" id="{FF516355-CCD8-C5CB-F068-4D29A1C78290}"/>
               </a:ext>
             </a:extLst>
           </p:cNvPr>
@@ -5033,7 +4907,7 @@
           <p:cNvPr id="4" name="コンテンツ プレースホルダー 3">
             <a:extLst>
               <a:ext uri="{FF2B5EF4-FFF2-40B4-BE49-F238E27FC236}">
-                <a16:creationId xmlns:a16="http://schemas.microsoft.com/office/drawing/2014/main" id="{83C47C80-942D-CCFD-E9B7-D2316E454030}"/>
+                <a16:creationId xmlns:a16="http://schemas.microsoft.com/office/drawing/2014/main" id="{B74CC880-5664-0E55-5466-48C970E30DF9}"/>
               </a:ext>
             </a:extLst>
           </p:cNvPr>
@@ -5127,7 +5001,7 @@
           <p:cNvPr id="5" name="日付プレースホルダー 4">
             <a:extLst>
               <a:ext uri="{FF2B5EF4-FFF2-40B4-BE49-F238E27FC236}">
-                <a16:creationId xmlns:a16="http://schemas.microsoft.com/office/drawing/2014/main" id="{B4E21DA7-78BF-B327-6B50-FC0CC7D45341}"/>
+                <a16:creationId xmlns:a16="http://schemas.microsoft.com/office/drawing/2014/main" id="{5BDDA981-F29B-7D63-2F31-DD37ED52E300}"/>
               </a:ext>
             </a:extLst>
           </p:cNvPr>
@@ -5143,7 +5017,7 @@
           <a:bodyPr/>
           <a:lstStyle/>
           <a:p>
-            <a:fld id="{6885E1A7-2E4F-4DF4-92AE-9CEE25F77787}" type="datetimeFigureOut">
+            <a:fld id="{5942FA36-335F-4625-B2EA-E4A937428F27}" type="datetimeFigureOut">
               <a:rPr kumimoji="1" lang="ja-JP" altLang="en-US" smtClean="0"/>
               <a:t>2026/11/1</a:t>
             </a:fld>
@@ -5156,7 +5030,7 @@
           <p:cNvPr id="6" name="フッター プレースホルダー 5">
             <a:extLst>
               <a:ext uri="{FF2B5EF4-FFF2-40B4-BE49-F238E27FC236}">
-                <a16:creationId xmlns:a16="http://schemas.microsoft.com/office/drawing/2014/main" id="{AF61797B-4A7B-D79A-F65D-11E34693DC29}"/>
+                <a16:creationId xmlns:a16="http://schemas.microsoft.com/office/drawing/2014/main" id="{1BF00518-A399-ABE3-3498-2EE242F83A8B}"/>
               </a:ext>
             </a:extLst>
           </p:cNvPr>
@@ -5181,7 +5055,7 @@
           <p:cNvPr id="7" name="スライド番号プレースホルダー 6">
             <a:extLst>
               <a:ext uri="{FF2B5EF4-FFF2-40B4-BE49-F238E27FC236}">
-                <a16:creationId xmlns:a16="http://schemas.microsoft.com/office/drawing/2014/main" id="{D90610C3-F6FA-0BA3-9341-7248C6E60274}"/>
+                <a16:creationId xmlns:a16="http://schemas.microsoft.com/office/drawing/2014/main" id="{F6865ABB-FBD8-4267-8DED-5422F8F30F20}"/>
               </a:ext>
             </a:extLst>
           </p:cNvPr>
@@ -5197,7 +5071,7 @@
           <a:bodyPr/>
           <a:lstStyle/>
           <a:p>
-            <a:fld id="{E7C10858-3222-4F13-839A-5A38B4D07059}" type="slidenum">
+            <a:fld id="{F142BB55-E2EF-4BBE-94B2-F4599AD45135}" type="slidenum">
               <a:rPr kumimoji="1" lang="ja-JP" altLang="en-US" smtClean="0"/>
               <a:t>‹#›</a:t>
             </a:fld>
@@ -5208,7 +5082,7 @@
     </p:spTree>
     <p:extLst>
       <p:ext uri="{BB962C8B-B14F-4D97-AF65-F5344CB8AC3E}">
-        <p14:creationId xmlns:p14="http://schemas.microsoft.com/office/powerpoint/2010/main" val="3590442004"/>
+        <p14:creationId xmlns:p14="http://schemas.microsoft.com/office/powerpoint/2010/main" val="451149875"/>
       </p:ext>
     </p:extLst>
   </p:cSld>
@@ -5240,7 +5114,7 @@
           <p:cNvPr id="2" name="タイトル 1">
             <a:extLst>
               <a:ext uri="{FF2B5EF4-FFF2-40B4-BE49-F238E27FC236}">
-                <a16:creationId xmlns:a16="http://schemas.microsoft.com/office/drawing/2014/main" id="{DF9BFB83-A79B-FBC2-30DF-6554F31A31AF}"/>
+                <a16:creationId xmlns:a16="http://schemas.microsoft.com/office/drawing/2014/main" id="{F475A12D-EFF2-372D-18F2-15CC40E14E0B}"/>
               </a:ext>
             </a:extLst>
           </p:cNvPr>
@@ -5273,7 +5147,7 @@
           <p:cNvPr id="3" name="テキスト プレースホルダー 2">
             <a:extLst>
               <a:ext uri="{FF2B5EF4-FFF2-40B4-BE49-F238E27FC236}">
-                <a16:creationId xmlns:a16="http://schemas.microsoft.com/office/drawing/2014/main" id="{B3C93EAD-08AB-E493-CD95-BEB627F62724}"/>
+                <a16:creationId xmlns:a16="http://schemas.microsoft.com/office/drawing/2014/main" id="{FE256AF3-B9E1-9066-61D2-B701DE060EC7}"/>
               </a:ext>
             </a:extLst>
           </p:cNvPr>
@@ -5344,7 +5218,7 @@
           <p:cNvPr id="4" name="コンテンツ プレースホルダー 3">
             <a:extLst>
               <a:ext uri="{FF2B5EF4-FFF2-40B4-BE49-F238E27FC236}">
-                <a16:creationId xmlns:a16="http://schemas.microsoft.com/office/drawing/2014/main" id="{D3B847AA-1007-E063-AA70-FA04F7501F63}"/>
+                <a16:creationId xmlns:a16="http://schemas.microsoft.com/office/drawing/2014/main" id="{5B1ED651-8101-5156-3756-DF271E7B6D58}"/>
               </a:ext>
             </a:extLst>
           </p:cNvPr>
@@ -5438,7 +5312,7 @@
           <p:cNvPr id="5" name="テキスト プレースホルダー 4">
             <a:extLst>
               <a:ext uri="{FF2B5EF4-FFF2-40B4-BE49-F238E27FC236}">
-                <a16:creationId xmlns:a16="http://schemas.microsoft.com/office/drawing/2014/main" id="{5A4885DB-C588-0199-FE48-CBD91234CAB6}"/>
+                <a16:creationId xmlns:a16="http://schemas.microsoft.com/office/drawing/2014/main" id="{6C8EF069-EDA0-9071-DE37-6F39B1159D1B}"/>
               </a:ext>
             </a:extLst>
           </p:cNvPr>
@@ -5509,7 +5383,7 @@
           <p:cNvPr id="6" name="コンテンツ プレースホルダー 5">
             <a:extLst>
               <a:ext uri="{FF2B5EF4-FFF2-40B4-BE49-F238E27FC236}">
-                <a16:creationId xmlns:a16="http://schemas.microsoft.com/office/drawing/2014/main" id="{900B4260-1892-4C50-B27C-0F4379EA30C7}"/>
+                <a16:creationId xmlns:a16="http://schemas.microsoft.com/office/drawing/2014/main" id="{C7428A2E-4454-F9C6-83C3-84B40C05E2C7}"/>
               </a:ext>
             </a:extLst>
           </p:cNvPr>
@@ -5603,7 +5477,7 @@
           <p:cNvPr id="7" name="日付プレースホルダー 6">
             <a:extLst>
               <a:ext uri="{FF2B5EF4-FFF2-40B4-BE49-F238E27FC236}">
-                <a16:creationId xmlns:a16="http://schemas.microsoft.com/office/drawing/2014/main" id="{7BD11CCE-A6A4-C886-17DC-178CF09D8855}"/>
+                <a16:creationId xmlns:a16="http://schemas.microsoft.com/office/drawing/2014/main" id="{1B3C1BDD-8708-6481-7979-0A3709ECD800}"/>
               </a:ext>
             </a:extLst>
           </p:cNvPr>
@@ -5619,7 +5493,7 @@
           <a:bodyPr/>
           <a:lstStyle/>
           <a:p>
-            <a:fld id="{6885E1A7-2E4F-4DF4-92AE-9CEE25F77787}" type="datetimeFigureOut">
+            <a:fld id="{5942FA36-335F-4625-B2EA-E4A937428F27}" type="datetimeFigureOut">
               <a:rPr kumimoji="1" lang="ja-JP" altLang="en-US" smtClean="0"/>
               <a:t>2026/11/1</a:t>
             </a:fld>
@@ -5632,7 +5506,7 @@
           <p:cNvPr id="8" name="フッター プレースホルダー 7">
             <a:extLst>
               <a:ext uri="{FF2B5EF4-FFF2-40B4-BE49-F238E27FC236}">
-                <a16:creationId xmlns:a16="http://schemas.microsoft.com/office/drawing/2014/main" id="{CEB5874A-857A-0CEB-5DF3-2B6ED74E603F}"/>
+                <a16:creationId xmlns:a16="http://schemas.microsoft.com/office/drawing/2014/main" id="{22B03EDC-06C3-717A-C7CC-BBE1D55C5A83}"/>
               </a:ext>
             </a:extLst>
           </p:cNvPr>
@@ -5657,7 +5531,7 @@
           <p:cNvPr id="9" name="スライド番号プレースホルダー 8">
             <a:extLst>
               <a:ext uri="{FF2B5EF4-FFF2-40B4-BE49-F238E27FC236}">
-                <a16:creationId xmlns:a16="http://schemas.microsoft.com/office/drawing/2014/main" id="{A2B6CB3C-25C3-B438-138E-922CBBB023AC}"/>
+                <a16:creationId xmlns:a16="http://schemas.microsoft.com/office/drawing/2014/main" id="{1A3B375D-045A-B969-0F0A-DD6E97395DAF}"/>
               </a:ext>
             </a:extLst>
           </p:cNvPr>
@@ -5673,7 +5547,7 @@
           <a:bodyPr/>
           <a:lstStyle/>
           <a:p>
-            <a:fld id="{E7C10858-3222-4F13-839A-5A38B4D07059}" type="slidenum">
+            <a:fld id="{F142BB55-E2EF-4BBE-94B2-F4599AD45135}" type="slidenum">
               <a:rPr kumimoji="1" lang="ja-JP" altLang="en-US" smtClean="0"/>
               <a:t>‹#›</a:t>
             </a:fld>
@@ -5684,7 +5558,7 @@
     </p:spTree>
     <p:extLst>
       <p:ext uri="{BB962C8B-B14F-4D97-AF65-F5344CB8AC3E}">
-        <p14:creationId xmlns:p14="http://schemas.microsoft.com/office/powerpoint/2010/main" val="2004351893"/>
+        <p14:creationId xmlns:p14="http://schemas.microsoft.com/office/powerpoint/2010/main" val="2578612863"/>
       </p:ext>
     </p:extLst>
   </p:cSld>
@@ -5716,7 +5590,7 @@
           <p:cNvPr id="2" name="タイトル 1">
             <a:extLst>
               <a:ext uri="{FF2B5EF4-FFF2-40B4-BE49-F238E27FC236}">
-                <a16:creationId xmlns:a16="http://schemas.microsoft.com/office/drawing/2014/main" id="{492DDF7A-A4CE-89DD-56BD-1940BEE74715}"/>
+                <a16:creationId xmlns:a16="http://schemas.microsoft.com/office/drawing/2014/main" id="{DCDBAE54-8063-92E7-72EE-A6E6F025A6EE}"/>
               </a:ext>
             </a:extLst>
           </p:cNvPr>
@@ -5744,7 +5618,7 @@
           <p:cNvPr id="3" name="日付プレースホルダー 2">
             <a:extLst>
               <a:ext uri="{FF2B5EF4-FFF2-40B4-BE49-F238E27FC236}">
-                <a16:creationId xmlns:a16="http://schemas.microsoft.com/office/drawing/2014/main" id="{4900628F-E5B5-0336-2F5F-DB55B356385E}"/>
+                <a16:creationId xmlns:a16="http://schemas.microsoft.com/office/drawing/2014/main" id="{0BCBE277-0CBD-850B-60EF-2A875232710C}"/>
               </a:ext>
             </a:extLst>
           </p:cNvPr>
@@ -5760,7 +5634,7 @@
           <a:bodyPr/>
           <a:lstStyle/>
           <a:p>
-            <a:fld id="{6885E1A7-2E4F-4DF4-92AE-9CEE25F77787}" type="datetimeFigureOut">
+            <a:fld id="{5942FA36-335F-4625-B2EA-E4A937428F27}" type="datetimeFigureOut">
               <a:rPr kumimoji="1" lang="ja-JP" altLang="en-US" smtClean="0"/>
               <a:t>2026/11/1</a:t>
             </a:fld>
@@ -5773,7 +5647,7 @@
           <p:cNvPr id="4" name="フッター プレースホルダー 3">
             <a:extLst>
               <a:ext uri="{FF2B5EF4-FFF2-40B4-BE49-F238E27FC236}">
-                <a16:creationId xmlns:a16="http://schemas.microsoft.com/office/drawing/2014/main" id="{F904CE2F-E284-BE76-0F7F-AC2938CA35AD}"/>
+                <a16:creationId xmlns:a16="http://schemas.microsoft.com/office/drawing/2014/main" id="{2313E30E-F49D-03DD-C144-858AD467AE15}"/>
               </a:ext>
             </a:extLst>
           </p:cNvPr>
@@ -5798,7 +5672,7 @@
           <p:cNvPr id="5" name="スライド番号プレースホルダー 4">
             <a:extLst>
               <a:ext uri="{FF2B5EF4-FFF2-40B4-BE49-F238E27FC236}">
-                <a16:creationId xmlns:a16="http://schemas.microsoft.com/office/drawing/2014/main" id="{1B6F6492-2AE2-8ADE-24A2-422F128AE6E3}"/>
+                <a16:creationId xmlns:a16="http://schemas.microsoft.com/office/drawing/2014/main" id="{4522F08F-1ACC-36BF-4C66-5685046D935A}"/>
               </a:ext>
             </a:extLst>
           </p:cNvPr>
@@ -5814,7 +5688,7 @@
           <a:bodyPr/>
           <a:lstStyle/>
           <a:p>
-            <a:fld id="{E7C10858-3222-4F13-839A-5A38B4D07059}" type="slidenum">
+            <a:fld id="{F142BB55-E2EF-4BBE-94B2-F4599AD45135}" type="slidenum">
               <a:rPr kumimoji="1" lang="ja-JP" altLang="en-US" smtClean="0"/>
               <a:t>‹#›</a:t>
             </a:fld>
@@ -5825,7 +5699,7 @@
     </p:spTree>
     <p:extLst>
       <p:ext uri="{BB962C8B-B14F-4D97-AF65-F5344CB8AC3E}">
-        <p14:creationId xmlns:p14="http://schemas.microsoft.com/office/powerpoint/2010/main" val="2969103142"/>
+        <p14:creationId xmlns:p14="http://schemas.microsoft.com/office/powerpoint/2010/main" val="4023454611"/>
       </p:ext>
     </p:extLst>
   </p:cSld>
@@ -5857,7 +5731,7 @@
           <p:cNvPr id="2" name="日付プレースホルダー 1">
             <a:extLst>
               <a:ext uri="{FF2B5EF4-FFF2-40B4-BE49-F238E27FC236}">
-                <a16:creationId xmlns:a16="http://schemas.microsoft.com/office/drawing/2014/main" id="{AE325E0A-6A39-8FA3-591D-9B3455F81592}"/>
+                <a16:creationId xmlns:a16="http://schemas.microsoft.com/office/drawing/2014/main" id="{1850D5BA-CD24-8FD7-762D-1BA6C911BBF6}"/>
               </a:ext>
             </a:extLst>
           </p:cNvPr>
@@ -5873,7 +5747,7 @@
           <a:bodyPr/>
           <a:lstStyle/>
           <a:p>
-            <a:fld id="{6885E1A7-2E4F-4DF4-92AE-9CEE25F77787}" type="datetimeFigureOut">
+            <a:fld id="{5942FA36-335F-4625-B2EA-E4A937428F27}" type="datetimeFigureOut">
               <a:rPr kumimoji="1" lang="ja-JP" altLang="en-US" smtClean="0"/>
               <a:t>2026/11/1</a:t>
             </a:fld>
@@ -5886,7 +5760,7 @@
           <p:cNvPr id="3" name="フッター プレースホルダー 2">
             <a:extLst>
               <a:ext uri="{FF2B5EF4-FFF2-40B4-BE49-F238E27FC236}">
-                <a16:creationId xmlns:a16="http://schemas.microsoft.com/office/drawing/2014/main" id="{88EA412A-DD98-E865-E1CE-BC6ECF0A29C9}"/>
+                <a16:creationId xmlns:a16="http://schemas.microsoft.com/office/drawing/2014/main" id="{C2D1A913-C4A7-5A26-A923-C8474EB98830}"/>
               </a:ext>
             </a:extLst>
           </p:cNvPr>
@@ -5911,7 +5785,7 @@
           <p:cNvPr id="4" name="スライド番号プレースホルダー 3">
             <a:extLst>
               <a:ext uri="{FF2B5EF4-FFF2-40B4-BE49-F238E27FC236}">
-                <a16:creationId xmlns:a16="http://schemas.microsoft.com/office/drawing/2014/main" id="{8CC1173C-C5B6-EB2D-D06F-2328F091BA7B}"/>
+                <a16:creationId xmlns:a16="http://schemas.microsoft.com/office/drawing/2014/main" id="{FB40E7A7-ACD7-7A6B-EE10-2941FD2F61DB}"/>
               </a:ext>
             </a:extLst>
           </p:cNvPr>
@@ -5927,7 +5801,7 @@
           <a:bodyPr/>
           <a:lstStyle/>
           <a:p>
-            <a:fld id="{E7C10858-3222-4F13-839A-5A38B4D07059}" type="slidenum">
+            <a:fld id="{F142BB55-E2EF-4BBE-94B2-F4599AD45135}" type="slidenum">
               <a:rPr kumimoji="1" lang="ja-JP" altLang="en-US" smtClean="0"/>
               <a:t>‹#›</a:t>
             </a:fld>
@@ -5938,7 +5812,7 @@
     </p:spTree>
     <p:extLst>
       <p:ext uri="{BB962C8B-B14F-4D97-AF65-F5344CB8AC3E}">
-        <p14:creationId xmlns:p14="http://schemas.microsoft.com/office/powerpoint/2010/main" val="1230304130"/>
+        <p14:creationId xmlns:p14="http://schemas.microsoft.com/office/powerpoint/2010/main" val="1614241300"/>
       </p:ext>
     </p:extLst>
   </p:cSld>
@@ -5970,7 +5844,7 @@
           <p:cNvPr id="2" name="タイトル 1">
             <a:extLst>
               <a:ext uri="{FF2B5EF4-FFF2-40B4-BE49-F238E27FC236}">
-                <a16:creationId xmlns:a16="http://schemas.microsoft.com/office/drawing/2014/main" id="{000C431F-8C5B-B20E-EFF8-ABE7EDD305D8}"/>
+                <a16:creationId xmlns:a16="http://schemas.microsoft.com/office/drawing/2014/main" id="{562D12DC-CE6D-4E34-A9DC-08B7770DF3F1}"/>
               </a:ext>
             </a:extLst>
           </p:cNvPr>
@@ -6007,7 +5881,7 @@
           <p:cNvPr id="3" name="コンテンツ プレースホルダー 2">
             <a:extLst>
               <a:ext uri="{FF2B5EF4-FFF2-40B4-BE49-F238E27FC236}">
-                <a16:creationId xmlns:a16="http://schemas.microsoft.com/office/drawing/2014/main" id="{33D9A969-55D6-D525-9341-7416808BC34E}"/>
+                <a16:creationId xmlns:a16="http://schemas.microsoft.com/office/drawing/2014/main" id="{237C4AAC-4221-C615-87E7-E4BCE6134EE3}"/>
               </a:ext>
             </a:extLst>
           </p:cNvPr>
@@ -6129,7 +6003,7 @@
           <p:cNvPr id="4" name="テキスト プレースホルダー 3">
             <a:extLst>
               <a:ext uri="{FF2B5EF4-FFF2-40B4-BE49-F238E27FC236}">
-                <a16:creationId xmlns:a16="http://schemas.microsoft.com/office/drawing/2014/main" id="{42646478-FD77-3D62-F318-BF35095572E3}"/>
+                <a16:creationId xmlns:a16="http://schemas.microsoft.com/office/drawing/2014/main" id="{A8D67A59-4E0C-D044-513A-26DBAD36C17A}"/>
               </a:ext>
             </a:extLst>
           </p:cNvPr>
@@ -6200,7 +6074,7 @@
           <p:cNvPr id="5" name="日付プレースホルダー 4">
             <a:extLst>
               <a:ext uri="{FF2B5EF4-FFF2-40B4-BE49-F238E27FC236}">
-                <a16:creationId xmlns:a16="http://schemas.microsoft.com/office/drawing/2014/main" id="{A5B398C9-998B-0172-28D8-8FA11C099B48}"/>
+                <a16:creationId xmlns:a16="http://schemas.microsoft.com/office/drawing/2014/main" id="{95E50C6E-4D5B-602C-DDC2-2D252323A38D}"/>
               </a:ext>
             </a:extLst>
           </p:cNvPr>
@@ -6216,7 +6090,7 @@
           <a:bodyPr/>
           <a:lstStyle/>
           <a:p>
-            <a:fld id="{6885E1A7-2E4F-4DF4-92AE-9CEE25F77787}" type="datetimeFigureOut">
+            <a:fld id="{5942FA36-335F-4625-B2EA-E4A937428F27}" type="datetimeFigureOut">
               <a:rPr kumimoji="1" lang="ja-JP" altLang="en-US" smtClean="0"/>
               <a:t>2026/11/1</a:t>
             </a:fld>
@@ -6229,7 +6103,7 @@
           <p:cNvPr id="6" name="フッター プレースホルダー 5">
             <a:extLst>
               <a:ext uri="{FF2B5EF4-FFF2-40B4-BE49-F238E27FC236}">
-                <a16:creationId xmlns:a16="http://schemas.microsoft.com/office/drawing/2014/main" id="{5F84B1D1-F925-4C7B-017A-947921DF4CE7}"/>
+                <a16:creationId xmlns:a16="http://schemas.microsoft.com/office/drawing/2014/main" id="{D29E66E8-40EF-7F62-44BC-6D3DAFF672B4}"/>
               </a:ext>
             </a:extLst>
           </p:cNvPr>
@@ -6254,7 +6128,7 @@
           <p:cNvPr id="7" name="スライド番号プレースホルダー 6">
             <a:extLst>
               <a:ext uri="{FF2B5EF4-FFF2-40B4-BE49-F238E27FC236}">
-                <a16:creationId xmlns:a16="http://schemas.microsoft.com/office/drawing/2014/main" id="{BF3F318A-0066-67DA-350B-C36DDB926070}"/>
+                <a16:creationId xmlns:a16="http://schemas.microsoft.com/office/drawing/2014/main" id="{2D49CDA2-883D-FA67-CA34-62B1FB447455}"/>
               </a:ext>
             </a:extLst>
           </p:cNvPr>
@@ -6270,7 +6144,7 @@
           <a:bodyPr/>
           <a:lstStyle/>
           <a:p>
-            <a:fld id="{E7C10858-3222-4F13-839A-5A38B4D07059}" type="slidenum">
+            <a:fld id="{F142BB55-E2EF-4BBE-94B2-F4599AD45135}" type="slidenum">
               <a:rPr kumimoji="1" lang="ja-JP" altLang="en-US" smtClean="0"/>
               <a:t>‹#›</a:t>
             </a:fld>
@@ -6281,7 +6155,7 @@
     </p:spTree>
     <p:extLst>
       <p:ext uri="{BB962C8B-B14F-4D97-AF65-F5344CB8AC3E}">
-        <p14:creationId xmlns:p14="http://schemas.microsoft.com/office/powerpoint/2010/main" val="4034978863"/>
+        <p14:creationId xmlns:p14="http://schemas.microsoft.com/office/powerpoint/2010/main" val="1569044493"/>
       </p:ext>
     </p:extLst>
   </p:cSld>
@@ -6313,7 +6187,7 @@
           <p:cNvPr id="2" name="タイトル 1">
             <a:extLst>
               <a:ext uri="{FF2B5EF4-FFF2-40B4-BE49-F238E27FC236}">
-                <a16:creationId xmlns:a16="http://schemas.microsoft.com/office/drawing/2014/main" id="{E521952A-B23B-DC7B-591F-C46D3A1E81AB}"/>
+                <a16:creationId xmlns:a16="http://schemas.microsoft.com/office/drawing/2014/main" id="{841D7F1D-6CC4-E45B-546A-224343740E79}"/>
               </a:ext>
             </a:extLst>
           </p:cNvPr>
@@ -6350,7 +6224,7 @@
           <p:cNvPr id="3" name="図プレースホルダー 2">
             <a:extLst>
               <a:ext uri="{FF2B5EF4-FFF2-40B4-BE49-F238E27FC236}">
-                <a16:creationId xmlns:a16="http://schemas.microsoft.com/office/drawing/2014/main" id="{FD57413B-10B6-420F-D932-F2EC28CD5163}"/>
+                <a16:creationId xmlns:a16="http://schemas.microsoft.com/office/drawing/2014/main" id="{E2E5451C-8CDA-C3A3-619F-4D749FC6835A}"/>
               </a:ext>
             </a:extLst>
           </p:cNvPr>
@@ -6417,7 +6291,7 @@
           <p:cNvPr id="4" name="テキスト プレースホルダー 3">
             <a:extLst>
               <a:ext uri="{FF2B5EF4-FFF2-40B4-BE49-F238E27FC236}">
-                <a16:creationId xmlns:a16="http://schemas.microsoft.com/office/drawing/2014/main" id="{7283F790-1A5E-2089-0B96-AB3F4ADE5272}"/>
+                <a16:creationId xmlns:a16="http://schemas.microsoft.com/office/drawing/2014/main" id="{D5C5F6AC-CB98-3F72-CB8E-8BE5CF148C80}"/>
               </a:ext>
             </a:extLst>
           </p:cNvPr>
@@ -6488,7 +6362,7 @@
           <p:cNvPr id="5" name="日付プレースホルダー 4">
             <a:extLst>
               <a:ext uri="{FF2B5EF4-FFF2-40B4-BE49-F238E27FC236}">
-                <a16:creationId xmlns:a16="http://schemas.microsoft.com/office/drawing/2014/main" id="{E4CD3EB5-4E73-177C-6653-339C04B4B66E}"/>
+                <a16:creationId xmlns:a16="http://schemas.microsoft.com/office/drawing/2014/main" id="{80F4D1C3-03EE-ECBB-6251-4D84D3C29EBF}"/>
               </a:ext>
             </a:extLst>
           </p:cNvPr>
@@ -6504,7 +6378,7 @@
           <a:bodyPr/>
           <a:lstStyle/>
           <a:p>
-            <a:fld id="{6885E1A7-2E4F-4DF4-92AE-9CEE25F77787}" type="datetimeFigureOut">
+            <a:fld id="{5942FA36-335F-4625-B2EA-E4A937428F27}" type="datetimeFigureOut">
               <a:rPr kumimoji="1" lang="ja-JP" altLang="en-US" smtClean="0"/>
               <a:t>2026/11/1</a:t>
             </a:fld>
@@ -6517,7 +6391,7 @@
           <p:cNvPr id="6" name="フッター プレースホルダー 5">
             <a:extLst>
               <a:ext uri="{FF2B5EF4-FFF2-40B4-BE49-F238E27FC236}">
-                <a16:creationId xmlns:a16="http://schemas.microsoft.com/office/drawing/2014/main" id="{133E145C-09E3-E146-2172-449706221BBD}"/>
+                <a16:creationId xmlns:a16="http://schemas.microsoft.com/office/drawing/2014/main" id="{4501C853-D783-F75B-E8B0-1A0C5632774C}"/>
               </a:ext>
             </a:extLst>
           </p:cNvPr>
@@ -6542,7 +6416,7 @@
           <p:cNvPr id="7" name="スライド番号プレースホルダー 6">
             <a:extLst>
               <a:ext uri="{FF2B5EF4-FFF2-40B4-BE49-F238E27FC236}">
-                <a16:creationId xmlns:a16="http://schemas.microsoft.com/office/drawing/2014/main" id="{118191AC-4094-4AFE-789B-7816A286650C}"/>
+                <a16:creationId xmlns:a16="http://schemas.microsoft.com/office/drawing/2014/main" id="{A57B9ED8-3FDA-EB69-9908-6E81E93CE185}"/>
               </a:ext>
             </a:extLst>
           </p:cNvPr>
@@ -6558,7 +6432,7 @@
           <a:bodyPr/>
           <a:lstStyle/>
           <a:p>
-            <a:fld id="{E7C10858-3222-4F13-839A-5A38B4D07059}" type="slidenum">
+            <a:fld id="{F142BB55-E2EF-4BBE-94B2-F4599AD45135}" type="slidenum">
               <a:rPr kumimoji="1" lang="ja-JP" altLang="en-US" smtClean="0"/>
               <a:t>‹#›</a:t>
             </a:fld>
@@ -6569,7 +6443,7 @@
     </p:spTree>
     <p:extLst>
       <p:ext uri="{BB962C8B-B14F-4D97-AF65-F5344CB8AC3E}">
-        <p14:creationId xmlns:p14="http://schemas.microsoft.com/office/powerpoint/2010/main" val="3858766724"/>
+        <p14:creationId xmlns:p14="http://schemas.microsoft.com/office/powerpoint/2010/main" val="2632724339"/>
       </p:ext>
     </p:extLst>
   </p:cSld>
@@ -6606,7 +6480,7 @@
           <p:cNvPr id="2" name="タイトル プレースホルダー 1">
             <a:extLst>
               <a:ext uri="{FF2B5EF4-FFF2-40B4-BE49-F238E27FC236}">
-                <a16:creationId xmlns:a16="http://schemas.microsoft.com/office/drawing/2014/main" id="{34B625CB-C63A-4478-87E2-81BD490AE4FF}"/>
+                <a16:creationId xmlns:a16="http://schemas.microsoft.com/office/drawing/2014/main" id="{1A30CE70-687F-1324-28F3-C00C366E69D4}"/>
               </a:ext>
             </a:extLst>
           </p:cNvPr>
@@ -6644,7 +6518,7 @@
           <p:cNvPr id="3" name="テキスト プレースホルダー 2">
             <a:extLst>
               <a:ext uri="{FF2B5EF4-FFF2-40B4-BE49-F238E27FC236}">
-                <a16:creationId xmlns:a16="http://schemas.microsoft.com/office/drawing/2014/main" id="{D430B49E-52DC-97C7-6810-E77995EA0A73}"/>
+                <a16:creationId xmlns:a16="http://schemas.microsoft.com/office/drawing/2014/main" id="{1DCFD986-230E-D94E-5CBF-C6FF5BC8E68C}"/>
               </a:ext>
             </a:extLst>
           </p:cNvPr>
@@ -6743,7 +6617,7 @@
           <p:cNvPr id="4" name="日付プレースホルダー 3">
             <a:extLst>
               <a:ext uri="{FF2B5EF4-FFF2-40B4-BE49-F238E27FC236}">
-                <a16:creationId xmlns:a16="http://schemas.microsoft.com/office/drawing/2014/main" id="{4273C3D9-B2EA-C414-89E6-D192199239E9}"/>
+                <a16:creationId xmlns:a16="http://schemas.microsoft.com/office/drawing/2014/main" id="{3606654C-8A95-9CAE-FCBE-42AE06275128}"/>
               </a:ext>
             </a:extLst>
           </p:cNvPr>
@@ -6777,7 +6651,7 @@
             </a:lvl1pPr>
           </a:lstStyle>
           <a:p>
-            <a:fld id="{6885E1A7-2E4F-4DF4-92AE-9CEE25F77787}" type="datetimeFigureOut">
+            <a:fld id="{5942FA36-335F-4625-B2EA-E4A937428F27}" type="datetimeFigureOut">
               <a:rPr kumimoji="1" lang="ja-JP" altLang="en-US" smtClean="0"/>
               <a:t>2026/11/1</a:t>
             </a:fld>
@@ -6790,7 +6664,7 @@
           <p:cNvPr id="5" name="フッター プレースホルダー 4">
             <a:extLst>
               <a:ext uri="{FF2B5EF4-FFF2-40B4-BE49-F238E27FC236}">
-                <a16:creationId xmlns:a16="http://schemas.microsoft.com/office/drawing/2014/main" id="{2F4A6FEB-14B7-0DF2-5C38-082D52A91601}"/>
+                <a16:creationId xmlns:a16="http://schemas.microsoft.com/office/drawing/2014/main" id="{EEF90FF1-2B30-9B5B-5938-DACB7D5D94B7}"/>
               </a:ext>
             </a:extLst>
           </p:cNvPr>
@@ -6833,7 +6707,7 @@
           <p:cNvPr id="6" name="スライド番号プレースホルダー 5">
             <a:extLst>
               <a:ext uri="{FF2B5EF4-FFF2-40B4-BE49-F238E27FC236}">
-                <a16:creationId xmlns:a16="http://schemas.microsoft.com/office/drawing/2014/main" id="{BEFF9F5D-157D-DF76-E594-0DBA30A3F863}"/>
+                <a16:creationId xmlns:a16="http://schemas.microsoft.com/office/drawing/2014/main" id="{F4AEBF18-BC1F-2A3E-73E2-06431743567F}"/>
               </a:ext>
             </a:extLst>
           </p:cNvPr>
@@ -6867,7 +6741,7 @@
             </a:lvl1pPr>
           </a:lstStyle>
           <a:p>
-            <a:fld id="{E7C10858-3222-4F13-839A-5A38B4D07059}" type="slidenum">
+            <a:fld id="{F142BB55-E2EF-4BBE-94B2-F4599AD45135}" type="slidenum">
               <a:rPr kumimoji="1" lang="ja-JP" altLang="en-US" smtClean="0"/>
               <a:t>‹#›</a:t>
             </a:fld>
@@ -6878,7 +6752,7 @@
     </p:spTree>
     <p:extLst>
       <p:ext uri="{BB962C8B-B14F-4D97-AF65-F5344CB8AC3E}">
-        <p14:creationId xmlns:p14="http://schemas.microsoft.com/office/powerpoint/2010/main" val="2564979813"/>
+        <p14:creationId xmlns:p14="http://schemas.microsoft.com/office/powerpoint/2010/main" val="430004040"/>
       </p:ext>
     </p:extLst>
   </p:cSld>
@@ -7201,7 +7075,7 @@
           <p:cNvPr id="2" name="タイトル 1">
             <a:extLst>
               <a:ext uri="{FF2B5EF4-FFF2-40B4-BE49-F238E27FC236}">
-                <a16:creationId xmlns:a16="http://schemas.microsoft.com/office/drawing/2014/main" id="{2FB44F42-504F-566B-7C13-C479331AB42E}"/>
+                <a16:creationId xmlns:a16="http://schemas.microsoft.com/office/drawing/2014/main" id="{C6D213EB-6B8E-731B-04E8-F5F11ED011E3}"/>
               </a:ext>
             </a:extLst>
           </p:cNvPr>
@@ -7238,7 +7112,7 @@
           <p:cNvPr id="3" name="グラフ 2">
             <a:extLst>
               <a:ext uri="{FF2B5EF4-FFF2-40B4-BE49-F238E27FC236}">
-                <a16:creationId xmlns:a16="http://schemas.microsoft.com/office/drawing/2014/main" id="{DDECF21F-B97B-6CF4-3CC3-A864C880F759}"/>
+                <a16:creationId xmlns:a16="http://schemas.microsoft.com/office/drawing/2014/main" id="{FC9CE052-3E20-C0B8-5D65-ED9658DBE3CF}"/>
               </a:ext>
             </a:extLst>
           </p:cNvPr>
@@ -7246,7 +7120,7 @@
           <p:nvPr>
             <p:extLst>
               <p:ext uri="{D42A27DB-BD31-4B8C-83A1-F6EECF244321}">
-                <p14:modId xmlns:p14="http://schemas.microsoft.com/office/powerpoint/2010/main" val="256826869"/>
+                <p14:modId xmlns:p14="http://schemas.microsoft.com/office/powerpoint/2010/main" val="2528535797"/>
               </p:ext>
             </p:extLst>
           </p:nvPr>
@@ -7266,7 +7140,7 @@
           <p:cNvPr id="4" name="図表 3">
             <a:extLst>
               <a:ext uri="{FF2B5EF4-FFF2-40B4-BE49-F238E27FC236}">
-                <a16:creationId xmlns:a16="http://schemas.microsoft.com/office/drawing/2014/main" id="{31E827CD-C8F2-69BD-771D-28C3F4F52C6F}"/>
+                <a16:creationId xmlns:a16="http://schemas.microsoft.com/office/drawing/2014/main" id="{DD277BD6-37B3-C21D-A052-426DF7D3ACBD}"/>
               </a:ext>
             </a:extLst>
           </p:cNvPr>
@@ -7274,7 +7148,7 @@
           <p:nvPr>
             <p:extLst>
               <p:ext uri="{D42A27DB-BD31-4B8C-83A1-F6EECF244321}">
-                <p14:modId xmlns:p14="http://schemas.microsoft.com/office/powerpoint/2010/main" val="2521600190"/>
+                <p14:modId xmlns:p14="http://schemas.microsoft.com/office/powerpoint/2010/main" val="365233079"/>
               </p:ext>
             </p:extLst>
           </p:nvPr>
@@ -7292,7 +7166,7 @@
     </p:spTree>
     <p:extLst>
       <p:ext uri="{BB962C8B-B14F-4D97-AF65-F5344CB8AC3E}">
-        <p14:creationId xmlns:p14="http://schemas.microsoft.com/office/powerpoint/2010/main" val="3858857051"/>
+        <p14:creationId xmlns:p14="http://schemas.microsoft.com/office/powerpoint/2010/main" val="3449532253"/>
       </p:ext>
     </p:extLst>
   </p:cSld>
